--- a/Jesus Paid It All.pptx
+++ b/Jesus Paid It All.pptx
@@ -266,7 +266,7 @@
           <a:p>
             <a:fld id="{E759A0DE-F190-5444-87AC-4719D5F20D15}" type="datetimeFigureOut">
               <a:rPr lang="en-US" smtClean="0"/>
-              <a:t>3/31/26</a:t>
+              <a:t>5/31/26</a:t>
             </a:fld>
             <a:endParaRPr lang="en-US"/>
           </a:p>
@@ -464,7 +464,7 @@
           <a:p>
             <a:fld id="{E759A0DE-F190-5444-87AC-4719D5F20D15}" type="datetimeFigureOut">
               <a:rPr lang="en-US" smtClean="0"/>
-              <a:t>3/31/26</a:t>
+              <a:t>5/31/26</a:t>
             </a:fld>
             <a:endParaRPr lang="en-US"/>
           </a:p>
@@ -672,7 +672,7 @@
           <a:p>
             <a:fld id="{E759A0DE-F190-5444-87AC-4719D5F20D15}" type="datetimeFigureOut">
               <a:rPr lang="en-US" smtClean="0"/>
-              <a:t>3/31/26</a:t>
+              <a:t>5/31/26</a:t>
             </a:fld>
             <a:endParaRPr lang="en-US"/>
           </a:p>
@@ -870,7 +870,7 @@
           <a:p>
             <a:fld id="{E759A0DE-F190-5444-87AC-4719D5F20D15}" type="datetimeFigureOut">
               <a:rPr lang="en-US" smtClean="0"/>
-              <a:t>3/31/26</a:t>
+              <a:t>5/31/26</a:t>
             </a:fld>
             <a:endParaRPr lang="en-US"/>
           </a:p>
@@ -1145,7 +1145,7 @@
           <a:p>
             <a:fld id="{E759A0DE-F190-5444-87AC-4719D5F20D15}" type="datetimeFigureOut">
               <a:rPr lang="en-US" smtClean="0"/>
-              <a:t>3/31/26</a:t>
+              <a:t>5/31/26</a:t>
             </a:fld>
             <a:endParaRPr lang="en-US"/>
           </a:p>
@@ -1410,7 +1410,7 @@
           <a:p>
             <a:fld id="{E759A0DE-F190-5444-87AC-4719D5F20D15}" type="datetimeFigureOut">
               <a:rPr lang="en-US" smtClean="0"/>
-              <a:t>3/31/26</a:t>
+              <a:t>5/31/26</a:t>
             </a:fld>
             <a:endParaRPr lang="en-US"/>
           </a:p>
@@ -1822,7 +1822,7 @@
           <a:p>
             <a:fld id="{E759A0DE-F190-5444-87AC-4719D5F20D15}" type="datetimeFigureOut">
               <a:rPr lang="en-US" smtClean="0"/>
-              <a:t>3/31/26</a:t>
+              <a:t>5/31/26</a:t>
             </a:fld>
             <a:endParaRPr lang="en-US"/>
           </a:p>
@@ -1963,7 +1963,7 @@
           <a:p>
             <a:fld id="{E759A0DE-F190-5444-87AC-4719D5F20D15}" type="datetimeFigureOut">
               <a:rPr lang="en-US" smtClean="0"/>
-              <a:t>3/31/26</a:t>
+              <a:t>5/31/26</a:t>
             </a:fld>
             <a:endParaRPr lang="en-US"/>
           </a:p>
@@ -2076,7 +2076,7 @@
           <a:p>
             <a:fld id="{E759A0DE-F190-5444-87AC-4719D5F20D15}" type="datetimeFigureOut">
               <a:rPr lang="en-US" smtClean="0"/>
-              <a:t>3/31/26</a:t>
+              <a:t>5/31/26</a:t>
             </a:fld>
             <a:endParaRPr lang="en-US"/>
           </a:p>
@@ -2387,7 +2387,7 @@
           <a:p>
             <a:fld id="{E759A0DE-F190-5444-87AC-4719D5F20D15}" type="datetimeFigureOut">
               <a:rPr lang="en-US" smtClean="0"/>
-              <a:t>3/31/26</a:t>
+              <a:t>5/31/26</a:t>
             </a:fld>
             <a:endParaRPr lang="en-US"/>
           </a:p>
@@ -2675,7 +2675,7 @@
           <a:p>
             <a:fld id="{E759A0DE-F190-5444-87AC-4719D5F20D15}" type="datetimeFigureOut">
               <a:rPr lang="en-US" smtClean="0"/>
-              <a:t>3/31/26</a:t>
+              <a:t>5/31/26</a:t>
             </a:fld>
             <a:endParaRPr lang="en-US"/>
           </a:p>
@@ -2916,7 +2916,7 @@
           <a:p>
             <a:fld id="{E759A0DE-F190-5444-87AC-4719D5F20D15}" type="datetimeFigureOut">
               <a:rPr lang="en-US" smtClean="0"/>
-              <a:t>3/31/26</a:t>
+              <a:t>5/31/26</a:t>
             </a:fld>
             <a:endParaRPr lang="en-US"/>
           </a:p>
@@ -4606,15 +4606,6 @@
             </a:endParaRPr>
           </a:p>
           <a:p>
-            <a:endParaRPr lang="en-US" sz="4400" dirty="0">
-              <a:solidFill>
-                <a:schemeClr val="bg1"/>
-              </a:solidFill>
-              <a:latin typeface="Avenir Medium" panose="02000503020000020003" pitchFamily="2" charset="0"/>
-              <a:ea typeface="Bodoni Ornaments" pitchFamily="2" charset="0"/>
-            </a:endParaRPr>
-          </a:p>
-          <a:p>
             <a:r>
               <a:rPr lang="en-US" sz="4400" dirty="0">
                 <a:solidFill>
@@ -4635,18 +4626,43 @@
                 <a:latin typeface="Avenir Medium" panose="02000503020000020003" pitchFamily="2" charset="0"/>
                 <a:ea typeface="Bodoni Ornaments" pitchFamily="2" charset="0"/>
               </a:rPr>
-              <a:t>And raised this life up from </a:t>
-            </a:r>
-            <a:r>
-              <a:rPr lang="en-US" sz="4400">
+              <a:t>And raised this life up from the dead</a:t>
+            </a:r>
+          </a:p>
+          <a:p>
+            <a:endParaRPr lang="en-US" sz="4400" dirty="0">
+              <a:solidFill>
+                <a:schemeClr val="bg1"/>
+              </a:solidFill>
+              <a:latin typeface="Avenir Medium" panose="02000503020000020003" pitchFamily="2" charset="0"/>
+              <a:ea typeface="Bodoni Ornaments" pitchFamily="2" charset="0"/>
+            </a:endParaRPr>
+          </a:p>
+          <a:p>
+            <a:r>
+              <a:rPr lang="en-US" sz="4400" dirty="0">
                 <a:solidFill>
                   <a:schemeClr val="bg1"/>
                 </a:solidFill>
                 <a:latin typeface="Avenir Medium" panose="02000503020000020003" pitchFamily="2" charset="0"/>
                 <a:ea typeface="Bodoni Ornaments" pitchFamily="2" charset="0"/>
               </a:rPr>
-              <a:t>the dead</a:t>
-            </a:r>
+              <a:t>Oh praise the one who paid my debt</a:t>
+            </a:r>
+          </a:p>
+          <a:p>
+            <a:r>
+              <a:rPr lang="en-US" sz="4400" dirty="0">
+                <a:solidFill>
+                  <a:schemeClr val="bg1"/>
+                </a:solidFill>
+                <a:latin typeface="Avenir Medium" panose="02000503020000020003" pitchFamily="2" charset="0"/>
+                <a:ea typeface="Bodoni Ornaments" pitchFamily="2" charset="0"/>
+              </a:rPr>
+              <a:t>And raised this life up from the dead</a:t>
+            </a:r>
+          </a:p>
+          <a:p>
             <a:endParaRPr lang="en-US" sz="4400" dirty="0">
               <a:solidFill>
                 <a:schemeClr val="bg1"/>

--- a/Jesus Paid It All.pptx
+++ b/Jesus Paid It All.pptx
@@ -2,25 +2,26 @@
 <file path=ppt/presentation.xml><?xml version="1.0" encoding="utf-8"?>
 <p:presentation xmlns:a="http://schemas.openxmlformats.org/drawingml/2006/main" xmlns:r="http://schemas.openxmlformats.org/officeDocument/2006/relationships" xmlns:p="http://schemas.openxmlformats.org/presentationml/2006/main" saveSubsetFonts="1" autoCompressPictures="0">
   <p:sldMasterIdLst>
-    <p:sldMasterId id="2147483648" r:id="rId1"/>
+    <p:sldMasterId id="2147483660" r:id="rId1"/>
   </p:sldMasterIdLst>
   <p:sldIdLst>
-    <p:sldId id="256" r:id="rId2"/>
-    <p:sldId id="284" r:id="rId3"/>
+    <p:sldId id="284" r:id="rId2"/>
+    <p:sldId id="290" r:id="rId3"/>
     <p:sldId id="276" r:id="rId4"/>
     <p:sldId id="285" r:id="rId5"/>
-    <p:sldId id="286" r:id="rId6"/>
+    <p:sldId id="291" r:id="rId6"/>
     <p:sldId id="287" r:id="rId7"/>
-    <p:sldId id="288" r:id="rId8"/>
+    <p:sldId id="292" r:id="rId8"/>
     <p:sldId id="289" r:id="rId9"/>
+    <p:sldId id="293" r:id="rId10"/>
   </p:sldIdLst>
-  <p:sldSz cx="12192000" cy="6858000"/>
+  <p:sldSz cx="9144000" cy="6858000" type="screen4x3"/>
   <p:notesSz cx="6858000" cy="9144000"/>
   <p:defaultTextStyle>
     <a:defPPr>
       <a:defRPr lang="en-US"/>
     </a:defPPr>
-    <a:lvl1pPr marL="0" algn="l" defTabSz="914400" rtl="0" eaLnBrk="1" latinLnBrk="0" hangingPunct="1">
+    <a:lvl1pPr marL="0" algn="l" defTabSz="457200" rtl="0" eaLnBrk="1" latinLnBrk="0" hangingPunct="1">
       <a:defRPr sz="1800" kern="1200">
         <a:solidFill>
           <a:schemeClr val="tx1"/>
@@ -30,7 +31,7 @@
         <a:cs typeface="+mn-cs"/>
       </a:defRPr>
     </a:lvl1pPr>
-    <a:lvl2pPr marL="457200" algn="l" defTabSz="914400" rtl="0" eaLnBrk="1" latinLnBrk="0" hangingPunct="1">
+    <a:lvl2pPr marL="457200" algn="l" defTabSz="457200" rtl="0" eaLnBrk="1" latinLnBrk="0" hangingPunct="1">
       <a:defRPr sz="1800" kern="1200">
         <a:solidFill>
           <a:schemeClr val="tx1"/>
@@ -40,7 +41,7 @@
         <a:cs typeface="+mn-cs"/>
       </a:defRPr>
     </a:lvl2pPr>
-    <a:lvl3pPr marL="914400" algn="l" defTabSz="914400" rtl="0" eaLnBrk="1" latinLnBrk="0" hangingPunct="1">
+    <a:lvl3pPr marL="914400" algn="l" defTabSz="457200" rtl="0" eaLnBrk="1" latinLnBrk="0" hangingPunct="1">
       <a:defRPr sz="1800" kern="1200">
         <a:solidFill>
           <a:schemeClr val="tx1"/>
@@ -50,7 +51,7 @@
         <a:cs typeface="+mn-cs"/>
       </a:defRPr>
     </a:lvl3pPr>
-    <a:lvl4pPr marL="1371600" algn="l" defTabSz="914400" rtl="0" eaLnBrk="1" latinLnBrk="0" hangingPunct="1">
+    <a:lvl4pPr marL="1371600" algn="l" defTabSz="457200" rtl="0" eaLnBrk="1" latinLnBrk="0" hangingPunct="1">
       <a:defRPr sz="1800" kern="1200">
         <a:solidFill>
           <a:schemeClr val="tx1"/>
@@ -60,7 +61,7 @@
         <a:cs typeface="+mn-cs"/>
       </a:defRPr>
     </a:lvl4pPr>
-    <a:lvl5pPr marL="1828800" algn="l" defTabSz="914400" rtl="0" eaLnBrk="1" latinLnBrk="0" hangingPunct="1">
+    <a:lvl5pPr marL="1828800" algn="l" defTabSz="457200" rtl="0" eaLnBrk="1" latinLnBrk="0" hangingPunct="1">
       <a:defRPr sz="1800" kern="1200">
         <a:solidFill>
           <a:schemeClr val="tx1"/>
@@ -70,7 +71,7 @@
         <a:cs typeface="+mn-cs"/>
       </a:defRPr>
     </a:lvl5pPr>
-    <a:lvl6pPr marL="2286000" algn="l" defTabSz="914400" rtl="0" eaLnBrk="1" latinLnBrk="0" hangingPunct="1">
+    <a:lvl6pPr marL="2286000" algn="l" defTabSz="457200" rtl="0" eaLnBrk="1" latinLnBrk="0" hangingPunct="1">
       <a:defRPr sz="1800" kern="1200">
         <a:solidFill>
           <a:schemeClr val="tx1"/>
@@ -80,7 +81,7 @@
         <a:cs typeface="+mn-cs"/>
       </a:defRPr>
     </a:lvl6pPr>
-    <a:lvl7pPr marL="2743200" algn="l" defTabSz="914400" rtl="0" eaLnBrk="1" latinLnBrk="0" hangingPunct="1">
+    <a:lvl7pPr marL="2743200" algn="l" defTabSz="457200" rtl="0" eaLnBrk="1" latinLnBrk="0" hangingPunct="1">
       <a:defRPr sz="1800" kern="1200">
         <a:solidFill>
           <a:schemeClr val="tx1"/>
@@ -90,7 +91,7 @@
         <a:cs typeface="+mn-cs"/>
       </a:defRPr>
     </a:lvl7pPr>
-    <a:lvl8pPr marL="3200400" algn="l" defTabSz="914400" rtl="0" eaLnBrk="1" latinLnBrk="0" hangingPunct="1">
+    <a:lvl8pPr marL="3200400" algn="l" defTabSz="457200" rtl="0" eaLnBrk="1" latinLnBrk="0" hangingPunct="1">
       <a:defRPr sz="1800" kern="1200">
         <a:solidFill>
           <a:schemeClr val="tx1"/>
@@ -100,7 +101,7 @@
         <a:cs typeface="+mn-cs"/>
       </a:defRPr>
     </a:lvl8pPr>
-    <a:lvl9pPr marL="3657600" algn="l" defTabSz="914400" rtl="0" eaLnBrk="1" latinLnBrk="0" hangingPunct="1">
+    <a:lvl9pPr marL="3657600" algn="l" defTabSz="457200" rtl="0" eaLnBrk="1" latinLnBrk="0" hangingPunct="1">
       <a:defRPr sz="1800" kern="1200">
         <a:solidFill>
           <a:schemeClr val="tx1"/>
@@ -138,13 +139,7 @@
       </p:grpSpPr>
       <p:sp>
         <p:nvSpPr>
-          <p:cNvPr id="2" name="Title 1">
-            <a:extLst>
-              <a:ext uri="{FF2B5EF4-FFF2-40B4-BE49-F238E27FC236}">
-                <a16:creationId xmlns:a16="http://schemas.microsoft.com/office/drawing/2014/main" id="{50FC4881-024B-CA4F-1A53-33C2DC0E7490}"/>
-              </a:ext>
-            </a:extLst>
-          </p:cNvPr>
+          <p:cNvPr id="2" name="Title 1"/>
           <p:cNvSpPr>
             <a:spLocks noGrp="1"/>
           </p:cNvSpPr>
@@ -154,8 +149,8 @@
         </p:nvSpPr>
         <p:spPr>
           <a:xfrm>
-            <a:off x="1524000" y="1122363"/>
-            <a:ext cx="9144000" cy="2387600"/>
+            <a:off x="685800" y="1122363"/>
+            <a:ext cx="7772400" cy="2387600"/>
           </a:xfrm>
         </p:spPr>
         <p:txBody>
@@ -170,18 +165,13 @@
               <a:rPr lang="en-US"/>
               <a:t>Click to edit Master title style</a:t>
             </a:r>
-          </a:p>
-        </p:txBody>
-      </p:sp>
-      <p:sp>
-        <p:nvSpPr>
-          <p:cNvPr id="3" name="Subtitle 2">
-            <a:extLst>
-              <a:ext uri="{FF2B5EF4-FFF2-40B4-BE49-F238E27FC236}">
-                <a16:creationId xmlns:a16="http://schemas.microsoft.com/office/drawing/2014/main" id="{8B0D2959-CEED-C8E4-130C-7C436E2473A7}"/>
-              </a:ext>
-            </a:extLst>
-          </p:cNvPr>
+            <a:endParaRPr lang="en-US" dirty="0"/>
+          </a:p>
+        </p:txBody>
+      </p:sp>
+      <p:sp>
+        <p:nvSpPr>
+          <p:cNvPr id="3" name="Subtitle 2"/>
           <p:cNvSpPr>
             <a:spLocks noGrp="1"/>
           </p:cNvSpPr>
@@ -191,8 +181,8 @@
         </p:nvSpPr>
         <p:spPr>
           <a:xfrm>
-            <a:off x="1524000" y="3602038"/>
-            <a:ext cx="9144000" cy="1655762"/>
+            <a:off x="1143000" y="3602038"/>
+            <a:ext cx="6858000" cy="1655762"/>
           </a:xfrm>
         </p:spPr>
         <p:txBody>
@@ -240,18 +230,13 @@
               <a:rPr lang="en-US"/>
               <a:t>Click to edit Master subtitle style</a:t>
             </a:r>
-          </a:p>
-        </p:txBody>
-      </p:sp>
-      <p:sp>
-        <p:nvSpPr>
-          <p:cNvPr id="4" name="Date Placeholder 3">
-            <a:extLst>
-              <a:ext uri="{FF2B5EF4-FFF2-40B4-BE49-F238E27FC236}">
-                <a16:creationId xmlns:a16="http://schemas.microsoft.com/office/drawing/2014/main" id="{4ABBB692-36FC-D0C6-12D7-33A0E66EA065}"/>
-              </a:ext>
-            </a:extLst>
-          </p:cNvPr>
+            <a:endParaRPr lang="en-US" dirty="0"/>
+          </a:p>
+        </p:txBody>
+      </p:sp>
+      <p:sp>
+        <p:nvSpPr>
+          <p:cNvPr id="4" name="Date Placeholder 3"/>
           <p:cNvSpPr>
             <a:spLocks noGrp="1"/>
           </p:cNvSpPr>
@@ -266,7 +251,7 @@
           <a:p>
             <a:fld id="{E759A0DE-F190-5444-87AC-4719D5F20D15}" type="datetimeFigureOut">
               <a:rPr lang="en-US" smtClean="0"/>
-              <a:t>5/31/26</a:t>
+              <a:t>6/6/26</a:t>
             </a:fld>
             <a:endParaRPr lang="en-US"/>
           </a:p>
@@ -274,13 +259,7 @@
       </p:sp>
       <p:sp>
         <p:nvSpPr>
-          <p:cNvPr id="5" name="Footer Placeholder 4">
-            <a:extLst>
-              <a:ext uri="{FF2B5EF4-FFF2-40B4-BE49-F238E27FC236}">
-                <a16:creationId xmlns:a16="http://schemas.microsoft.com/office/drawing/2014/main" id="{51817876-8CFB-960B-6A57-C7F9FD39D3EC}"/>
-              </a:ext>
-            </a:extLst>
-          </p:cNvPr>
+          <p:cNvPr id="5" name="Footer Placeholder 4"/>
           <p:cNvSpPr>
             <a:spLocks noGrp="1"/>
           </p:cNvSpPr>
@@ -299,13 +278,7 @@
       </p:sp>
       <p:sp>
         <p:nvSpPr>
-          <p:cNvPr id="6" name="Slide Number Placeholder 5">
-            <a:extLst>
-              <a:ext uri="{FF2B5EF4-FFF2-40B4-BE49-F238E27FC236}">
-                <a16:creationId xmlns:a16="http://schemas.microsoft.com/office/drawing/2014/main" id="{DB548E83-1153-3307-5818-CD7F2833A3F5}"/>
-              </a:ext>
-            </a:extLst>
-          </p:cNvPr>
+          <p:cNvPr id="6" name="Slide Number Placeholder 5"/>
           <p:cNvSpPr>
             <a:spLocks noGrp="1"/>
           </p:cNvSpPr>
@@ -329,7 +302,7 @@
     </p:spTree>
     <p:extLst>
       <p:ext uri="{BB962C8B-B14F-4D97-AF65-F5344CB8AC3E}">
-        <p14:creationId xmlns:p14="http://schemas.microsoft.com/office/powerpoint/2010/main" val="2594881872"/>
+        <p14:creationId xmlns:p14="http://schemas.microsoft.com/office/powerpoint/2010/main" val="2590964801"/>
       </p:ext>
     </p:extLst>
   </p:cSld>
@@ -358,13 +331,7 @@
       </p:grpSpPr>
       <p:sp>
         <p:nvSpPr>
-          <p:cNvPr id="2" name="Title 1">
-            <a:extLst>
-              <a:ext uri="{FF2B5EF4-FFF2-40B4-BE49-F238E27FC236}">
-                <a16:creationId xmlns:a16="http://schemas.microsoft.com/office/drawing/2014/main" id="{9015C597-3152-5765-EBC1-B17D9951543D}"/>
-              </a:ext>
-            </a:extLst>
-          </p:cNvPr>
+          <p:cNvPr id="2" name="Title 1"/>
           <p:cNvSpPr>
             <a:spLocks noGrp="1"/>
           </p:cNvSpPr>
@@ -381,18 +348,13 @@
               <a:rPr lang="en-US"/>
               <a:t>Click to edit Master title style</a:t>
             </a:r>
-          </a:p>
-        </p:txBody>
-      </p:sp>
-      <p:sp>
-        <p:nvSpPr>
-          <p:cNvPr id="3" name="Vertical Text Placeholder 2">
-            <a:extLst>
-              <a:ext uri="{FF2B5EF4-FFF2-40B4-BE49-F238E27FC236}">
-                <a16:creationId xmlns:a16="http://schemas.microsoft.com/office/drawing/2014/main" id="{5BA5F73E-18E1-021C-9878-B37DC31E2802}"/>
-              </a:ext>
-            </a:extLst>
-          </p:cNvPr>
+            <a:endParaRPr lang="en-US" dirty="0"/>
+          </a:p>
+        </p:txBody>
+      </p:sp>
+      <p:sp>
+        <p:nvSpPr>
+          <p:cNvPr id="3" name="Vertical Text Placeholder 2"/>
           <p:cNvSpPr>
             <a:spLocks noGrp="1"/>
           </p:cNvSpPr>
@@ -438,18 +400,13 @@
               <a:rPr lang="en-US"/>
               <a:t>Fifth level</a:t>
             </a:r>
-          </a:p>
-        </p:txBody>
-      </p:sp>
-      <p:sp>
-        <p:nvSpPr>
-          <p:cNvPr id="4" name="Date Placeholder 3">
-            <a:extLst>
-              <a:ext uri="{FF2B5EF4-FFF2-40B4-BE49-F238E27FC236}">
-                <a16:creationId xmlns:a16="http://schemas.microsoft.com/office/drawing/2014/main" id="{B683AF53-E0B5-2F63-C15E-4BF621A3186B}"/>
-              </a:ext>
-            </a:extLst>
-          </p:cNvPr>
+            <a:endParaRPr lang="en-US" dirty="0"/>
+          </a:p>
+        </p:txBody>
+      </p:sp>
+      <p:sp>
+        <p:nvSpPr>
+          <p:cNvPr id="4" name="Date Placeholder 3"/>
           <p:cNvSpPr>
             <a:spLocks noGrp="1"/>
           </p:cNvSpPr>
@@ -464,7 +421,7 @@
           <a:p>
             <a:fld id="{E759A0DE-F190-5444-87AC-4719D5F20D15}" type="datetimeFigureOut">
               <a:rPr lang="en-US" smtClean="0"/>
-              <a:t>5/31/26</a:t>
+              <a:t>6/6/26</a:t>
             </a:fld>
             <a:endParaRPr lang="en-US"/>
           </a:p>
@@ -472,13 +429,7 @@
       </p:sp>
       <p:sp>
         <p:nvSpPr>
-          <p:cNvPr id="5" name="Footer Placeholder 4">
-            <a:extLst>
-              <a:ext uri="{FF2B5EF4-FFF2-40B4-BE49-F238E27FC236}">
-                <a16:creationId xmlns:a16="http://schemas.microsoft.com/office/drawing/2014/main" id="{D1CA465D-C46F-7FA4-9154-773B74869505}"/>
-              </a:ext>
-            </a:extLst>
-          </p:cNvPr>
+          <p:cNvPr id="5" name="Footer Placeholder 4"/>
           <p:cNvSpPr>
             <a:spLocks noGrp="1"/>
           </p:cNvSpPr>
@@ -497,13 +448,7 @@
       </p:sp>
       <p:sp>
         <p:nvSpPr>
-          <p:cNvPr id="6" name="Slide Number Placeholder 5">
-            <a:extLst>
-              <a:ext uri="{FF2B5EF4-FFF2-40B4-BE49-F238E27FC236}">
-                <a16:creationId xmlns:a16="http://schemas.microsoft.com/office/drawing/2014/main" id="{BBA3BEE5-DE05-B54F-20CA-E8C336AE957E}"/>
-              </a:ext>
-            </a:extLst>
-          </p:cNvPr>
+          <p:cNvPr id="6" name="Slide Number Placeholder 5"/>
           <p:cNvSpPr>
             <a:spLocks noGrp="1"/>
           </p:cNvSpPr>
@@ -527,7 +472,7 @@
     </p:spTree>
     <p:extLst>
       <p:ext uri="{BB962C8B-B14F-4D97-AF65-F5344CB8AC3E}">
-        <p14:creationId xmlns:p14="http://schemas.microsoft.com/office/powerpoint/2010/main" val="3115587574"/>
+        <p14:creationId xmlns:p14="http://schemas.microsoft.com/office/powerpoint/2010/main" val="1493575554"/>
       </p:ext>
     </p:extLst>
   </p:cSld>
@@ -556,13 +501,7 @@
       </p:grpSpPr>
       <p:sp>
         <p:nvSpPr>
-          <p:cNvPr id="2" name="Vertical Title 1">
-            <a:extLst>
-              <a:ext uri="{FF2B5EF4-FFF2-40B4-BE49-F238E27FC236}">
-                <a16:creationId xmlns:a16="http://schemas.microsoft.com/office/drawing/2014/main" id="{42C72931-C193-DCDC-01FD-20CDA0AD4513}"/>
-              </a:ext>
-            </a:extLst>
-          </p:cNvPr>
+          <p:cNvPr id="2" name="Vertical Title 1"/>
           <p:cNvSpPr>
             <a:spLocks noGrp="1"/>
           </p:cNvSpPr>
@@ -572,8 +511,8 @@
         </p:nvSpPr>
         <p:spPr>
           <a:xfrm>
-            <a:off x="8724900" y="365125"/>
-            <a:ext cx="2628900" cy="5811838"/>
+            <a:off x="6543675" y="365125"/>
+            <a:ext cx="1971675" cy="5811838"/>
           </a:xfrm>
         </p:spPr>
         <p:txBody>
@@ -584,18 +523,13 @@
               <a:rPr lang="en-US"/>
               <a:t>Click to edit Master title style</a:t>
             </a:r>
-          </a:p>
-        </p:txBody>
-      </p:sp>
-      <p:sp>
-        <p:nvSpPr>
-          <p:cNvPr id="3" name="Vertical Text Placeholder 2">
-            <a:extLst>
-              <a:ext uri="{FF2B5EF4-FFF2-40B4-BE49-F238E27FC236}">
-                <a16:creationId xmlns:a16="http://schemas.microsoft.com/office/drawing/2014/main" id="{E65B2C1B-4D9D-9A62-13D7-01C6580B781D}"/>
-              </a:ext>
-            </a:extLst>
-          </p:cNvPr>
+            <a:endParaRPr lang="en-US" dirty="0"/>
+          </a:p>
+        </p:txBody>
+      </p:sp>
+      <p:sp>
+        <p:nvSpPr>
+          <p:cNvPr id="3" name="Vertical Text Placeholder 2"/>
           <p:cNvSpPr>
             <a:spLocks noGrp="1"/>
           </p:cNvSpPr>
@@ -605,8 +539,8 @@
         </p:nvSpPr>
         <p:spPr>
           <a:xfrm>
-            <a:off x="838200" y="365125"/>
-            <a:ext cx="7734300" cy="5811838"/>
+            <a:off x="628650" y="365125"/>
+            <a:ext cx="5800725" cy="5811838"/>
           </a:xfrm>
         </p:spPr>
         <p:txBody>
@@ -646,18 +580,13 @@
               <a:rPr lang="en-US"/>
               <a:t>Fifth level</a:t>
             </a:r>
-          </a:p>
-        </p:txBody>
-      </p:sp>
-      <p:sp>
-        <p:nvSpPr>
-          <p:cNvPr id="4" name="Date Placeholder 3">
-            <a:extLst>
-              <a:ext uri="{FF2B5EF4-FFF2-40B4-BE49-F238E27FC236}">
-                <a16:creationId xmlns:a16="http://schemas.microsoft.com/office/drawing/2014/main" id="{57445465-66E1-00A0-A5D2-D034616CC34D}"/>
-              </a:ext>
-            </a:extLst>
-          </p:cNvPr>
+            <a:endParaRPr lang="en-US" dirty="0"/>
+          </a:p>
+        </p:txBody>
+      </p:sp>
+      <p:sp>
+        <p:nvSpPr>
+          <p:cNvPr id="4" name="Date Placeholder 3"/>
           <p:cNvSpPr>
             <a:spLocks noGrp="1"/>
           </p:cNvSpPr>
@@ -672,7 +601,7 @@
           <a:p>
             <a:fld id="{E759A0DE-F190-5444-87AC-4719D5F20D15}" type="datetimeFigureOut">
               <a:rPr lang="en-US" smtClean="0"/>
-              <a:t>5/31/26</a:t>
+              <a:t>6/6/26</a:t>
             </a:fld>
             <a:endParaRPr lang="en-US"/>
           </a:p>
@@ -680,13 +609,7 @@
       </p:sp>
       <p:sp>
         <p:nvSpPr>
-          <p:cNvPr id="5" name="Footer Placeholder 4">
-            <a:extLst>
-              <a:ext uri="{FF2B5EF4-FFF2-40B4-BE49-F238E27FC236}">
-                <a16:creationId xmlns:a16="http://schemas.microsoft.com/office/drawing/2014/main" id="{F253519E-C69A-9396-C73F-1ACB40774508}"/>
-              </a:ext>
-            </a:extLst>
-          </p:cNvPr>
+          <p:cNvPr id="5" name="Footer Placeholder 4"/>
           <p:cNvSpPr>
             <a:spLocks noGrp="1"/>
           </p:cNvSpPr>
@@ -705,13 +628,7 @@
       </p:sp>
       <p:sp>
         <p:nvSpPr>
-          <p:cNvPr id="6" name="Slide Number Placeholder 5">
-            <a:extLst>
-              <a:ext uri="{FF2B5EF4-FFF2-40B4-BE49-F238E27FC236}">
-                <a16:creationId xmlns:a16="http://schemas.microsoft.com/office/drawing/2014/main" id="{CC85BFC6-ABA4-44D2-E110-CE59D7D2AE43}"/>
-              </a:ext>
-            </a:extLst>
-          </p:cNvPr>
+          <p:cNvPr id="6" name="Slide Number Placeholder 5"/>
           <p:cNvSpPr>
             <a:spLocks noGrp="1"/>
           </p:cNvSpPr>
@@ -735,7 +652,7 @@
     </p:spTree>
     <p:extLst>
       <p:ext uri="{BB962C8B-B14F-4D97-AF65-F5344CB8AC3E}">
-        <p14:creationId xmlns:p14="http://schemas.microsoft.com/office/powerpoint/2010/main" val="1588597314"/>
+        <p14:creationId xmlns:p14="http://schemas.microsoft.com/office/powerpoint/2010/main" val="2235340678"/>
       </p:ext>
     </p:extLst>
   </p:cSld>
@@ -764,13 +681,7 @@
       </p:grpSpPr>
       <p:sp>
         <p:nvSpPr>
-          <p:cNvPr id="2" name="Title 1">
-            <a:extLst>
-              <a:ext uri="{FF2B5EF4-FFF2-40B4-BE49-F238E27FC236}">
-                <a16:creationId xmlns:a16="http://schemas.microsoft.com/office/drawing/2014/main" id="{A4C6B7EA-B38C-12D1-5730-E271A11FB914}"/>
-              </a:ext>
-            </a:extLst>
-          </p:cNvPr>
+          <p:cNvPr id="2" name="Title 1"/>
           <p:cNvSpPr>
             <a:spLocks noGrp="1"/>
           </p:cNvSpPr>
@@ -787,18 +698,13 @@
               <a:rPr lang="en-US"/>
               <a:t>Click to edit Master title style</a:t>
             </a:r>
-          </a:p>
-        </p:txBody>
-      </p:sp>
-      <p:sp>
-        <p:nvSpPr>
-          <p:cNvPr id="3" name="Content Placeholder 2">
-            <a:extLst>
-              <a:ext uri="{FF2B5EF4-FFF2-40B4-BE49-F238E27FC236}">
-                <a16:creationId xmlns:a16="http://schemas.microsoft.com/office/drawing/2014/main" id="{5D8D1A30-880C-91DF-D6D6-0BE623BC9F03}"/>
-              </a:ext>
-            </a:extLst>
-          </p:cNvPr>
+            <a:endParaRPr lang="en-US" dirty="0"/>
+          </a:p>
+        </p:txBody>
+      </p:sp>
+      <p:sp>
+        <p:nvSpPr>
+          <p:cNvPr id="3" name="Content Placeholder 2"/>
           <p:cNvSpPr>
             <a:spLocks noGrp="1"/>
           </p:cNvSpPr>
@@ -844,18 +750,13 @@
               <a:rPr lang="en-US"/>
               <a:t>Fifth level</a:t>
             </a:r>
-          </a:p>
-        </p:txBody>
-      </p:sp>
-      <p:sp>
-        <p:nvSpPr>
-          <p:cNvPr id="4" name="Date Placeholder 3">
-            <a:extLst>
-              <a:ext uri="{FF2B5EF4-FFF2-40B4-BE49-F238E27FC236}">
-                <a16:creationId xmlns:a16="http://schemas.microsoft.com/office/drawing/2014/main" id="{27753098-E2DC-41B2-9361-756938A8EBFE}"/>
-              </a:ext>
-            </a:extLst>
-          </p:cNvPr>
+            <a:endParaRPr lang="en-US" dirty="0"/>
+          </a:p>
+        </p:txBody>
+      </p:sp>
+      <p:sp>
+        <p:nvSpPr>
+          <p:cNvPr id="4" name="Date Placeholder 3"/>
           <p:cNvSpPr>
             <a:spLocks noGrp="1"/>
           </p:cNvSpPr>
@@ -870,7 +771,7 @@
           <a:p>
             <a:fld id="{E759A0DE-F190-5444-87AC-4719D5F20D15}" type="datetimeFigureOut">
               <a:rPr lang="en-US" smtClean="0"/>
-              <a:t>5/31/26</a:t>
+              <a:t>6/6/26</a:t>
             </a:fld>
             <a:endParaRPr lang="en-US"/>
           </a:p>
@@ -878,13 +779,7 @@
       </p:sp>
       <p:sp>
         <p:nvSpPr>
-          <p:cNvPr id="5" name="Footer Placeholder 4">
-            <a:extLst>
-              <a:ext uri="{FF2B5EF4-FFF2-40B4-BE49-F238E27FC236}">
-                <a16:creationId xmlns:a16="http://schemas.microsoft.com/office/drawing/2014/main" id="{E463E6B5-5EA8-FE6C-FA06-4515DC0C07A4}"/>
-              </a:ext>
-            </a:extLst>
-          </p:cNvPr>
+          <p:cNvPr id="5" name="Footer Placeholder 4"/>
           <p:cNvSpPr>
             <a:spLocks noGrp="1"/>
           </p:cNvSpPr>
@@ -903,13 +798,7 @@
       </p:sp>
       <p:sp>
         <p:nvSpPr>
-          <p:cNvPr id="6" name="Slide Number Placeholder 5">
-            <a:extLst>
-              <a:ext uri="{FF2B5EF4-FFF2-40B4-BE49-F238E27FC236}">
-                <a16:creationId xmlns:a16="http://schemas.microsoft.com/office/drawing/2014/main" id="{196A6D58-9856-3B55-DBEA-1B9A3269B325}"/>
-              </a:ext>
-            </a:extLst>
-          </p:cNvPr>
+          <p:cNvPr id="6" name="Slide Number Placeholder 5"/>
           <p:cNvSpPr>
             <a:spLocks noGrp="1"/>
           </p:cNvSpPr>
@@ -933,7 +822,7 @@
     </p:spTree>
     <p:extLst>
       <p:ext uri="{BB962C8B-B14F-4D97-AF65-F5344CB8AC3E}">
-        <p14:creationId xmlns:p14="http://schemas.microsoft.com/office/powerpoint/2010/main" val="1474312020"/>
+        <p14:creationId xmlns:p14="http://schemas.microsoft.com/office/powerpoint/2010/main" val="547663681"/>
       </p:ext>
     </p:extLst>
   </p:cSld>
@@ -962,13 +851,7 @@
       </p:grpSpPr>
       <p:sp>
         <p:nvSpPr>
-          <p:cNvPr id="2" name="Title 1">
-            <a:extLst>
-              <a:ext uri="{FF2B5EF4-FFF2-40B4-BE49-F238E27FC236}">
-                <a16:creationId xmlns:a16="http://schemas.microsoft.com/office/drawing/2014/main" id="{F3003BE6-BFB2-0EF8-7BD3-99B4FF56B7C7}"/>
-              </a:ext>
-            </a:extLst>
-          </p:cNvPr>
+          <p:cNvPr id="2" name="Title 1"/>
           <p:cNvSpPr>
             <a:spLocks noGrp="1"/>
           </p:cNvSpPr>
@@ -978,8 +861,8 @@
         </p:nvSpPr>
         <p:spPr>
           <a:xfrm>
-            <a:off x="831850" y="1709738"/>
-            <a:ext cx="10515600" cy="2852737"/>
+            <a:off x="623888" y="1709739"/>
+            <a:ext cx="7886700" cy="2852737"/>
           </a:xfrm>
         </p:spPr>
         <p:txBody>
@@ -994,18 +877,13 @@
               <a:rPr lang="en-US"/>
               <a:t>Click to edit Master title style</a:t>
             </a:r>
-          </a:p>
-        </p:txBody>
-      </p:sp>
-      <p:sp>
-        <p:nvSpPr>
-          <p:cNvPr id="3" name="Text Placeholder 2">
-            <a:extLst>
-              <a:ext uri="{FF2B5EF4-FFF2-40B4-BE49-F238E27FC236}">
-                <a16:creationId xmlns:a16="http://schemas.microsoft.com/office/drawing/2014/main" id="{95E87140-F157-4DFF-CE20-2F5B759FC1E1}"/>
-              </a:ext>
-            </a:extLst>
-          </p:cNvPr>
+            <a:endParaRPr lang="en-US" dirty="0"/>
+          </a:p>
+        </p:txBody>
+      </p:sp>
+      <p:sp>
+        <p:nvSpPr>
+          <p:cNvPr id="3" name="Text Placeholder 2"/>
           <p:cNvSpPr>
             <a:spLocks noGrp="1"/>
           </p:cNvSpPr>
@@ -1015,8 +893,8 @@
         </p:nvSpPr>
         <p:spPr>
           <a:xfrm>
-            <a:off x="831850" y="4589463"/>
-            <a:ext cx="10515600" cy="1500187"/>
+            <a:off x="623888" y="4589464"/>
+            <a:ext cx="7886700" cy="1500187"/>
           </a:xfrm>
         </p:spPr>
         <p:txBody>
@@ -1124,13 +1002,7 @@
       </p:sp>
       <p:sp>
         <p:nvSpPr>
-          <p:cNvPr id="4" name="Date Placeholder 3">
-            <a:extLst>
-              <a:ext uri="{FF2B5EF4-FFF2-40B4-BE49-F238E27FC236}">
-                <a16:creationId xmlns:a16="http://schemas.microsoft.com/office/drawing/2014/main" id="{E119DC89-D1D7-E179-4B62-551014DFE5B3}"/>
-              </a:ext>
-            </a:extLst>
-          </p:cNvPr>
+          <p:cNvPr id="4" name="Date Placeholder 3"/>
           <p:cNvSpPr>
             <a:spLocks noGrp="1"/>
           </p:cNvSpPr>
@@ -1145,7 +1017,7 @@
           <a:p>
             <a:fld id="{E759A0DE-F190-5444-87AC-4719D5F20D15}" type="datetimeFigureOut">
               <a:rPr lang="en-US" smtClean="0"/>
-              <a:t>5/31/26</a:t>
+              <a:t>6/6/26</a:t>
             </a:fld>
             <a:endParaRPr lang="en-US"/>
           </a:p>
@@ -1153,13 +1025,7 @@
       </p:sp>
       <p:sp>
         <p:nvSpPr>
-          <p:cNvPr id="5" name="Footer Placeholder 4">
-            <a:extLst>
-              <a:ext uri="{FF2B5EF4-FFF2-40B4-BE49-F238E27FC236}">
-                <a16:creationId xmlns:a16="http://schemas.microsoft.com/office/drawing/2014/main" id="{0DC033CF-70D2-4EFC-5477-15F7486A8F3C}"/>
-              </a:ext>
-            </a:extLst>
-          </p:cNvPr>
+          <p:cNvPr id="5" name="Footer Placeholder 4"/>
           <p:cNvSpPr>
             <a:spLocks noGrp="1"/>
           </p:cNvSpPr>
@@ -1178,13 +1044,7 @@
       </p:sp>
       <p:sp>
         <p:nvSpPr>
-          <p:cNvPr id="6" name="Slide Number Placeholder 5">
-            <a:extLst>
-              <a:ext uri="{FF2B5EF4-FFF2-40B4-BE49-F238E27FC236}">
-                <a16:creationId xmlns:a16="http://schemas.microsoft.com/office/drawing/2014/main" id="{797ECCF9-ED4E-20EE-67CD-F55D0D853A8C}"/>
-              </a:ext>
-            </a:extLst>
-          </p:cNvPr>
+          <p:cNvPr id="6" name="Slide Number Placeholder 5"/>
           <p:cNvSpPr>
             <a:spLocks noGrp="1"/>
           </p:cNvSpPr>
@@ -1208,7 +1068,7 @@
     </p:spTree>
     <p:extLst>
       <p:ext uri="{BB962C8B-B14F-4D97-AF65-F5344CB8AC3E}">
-        <p14:creationId xmlns:p14="http://schemas.microsoft.com/office/powerpoint/2010/main" val="3736666041"/>
+        <p14:creationId xmlns:p14="http://schemas.microsoft.com/office/powerpoint/2010/main" val="2685496008"/>
       </p:ext>
     </p:extLst>
   </p:cSld>
@@ -1237,13 +1097,7 @@
       </p:grpSpPr>
       <p:sp>
         <p:nvSpPr>
-          <p:cNvPr id="2" name="Title 1">
-            <a:extLst>
-              <a:ext uri="{FF2B5EF4-FFF2-40B4-BE49-F238E27FC236}">
-                <a16:creationId xmlns:a16="http://schemas.microsoft.com/office/drawing/2014/main" id="{74DD7124-6407-E388-DFAC-CEAEF342D72D}"/>
-              </a:ext>
-            </a:extLst>
-          </p:cNvPr>
+          <p:cNvPr id="2" name="Title 1"/>
           <p:cNvSpPr>
             <a:spLocks noGrp="1"/>
           </p:cNvSpPr>
@@ -1260,18 +1114,13 @@
               <a:rPr lang="en-US"/>
               <a:t>Click to edit Master title style</a:t>
             </a:r>
-          </a:p>
-        </p:txBody>
-      </p:sp>
-      <p:sp>
-        <p:nvSpPr>
-          <p:cNvPr id="3" name="Content Placeholder 2">
-            <a:extLst>
-              <a:ext uri="{FF2B5EF4-FFF2-40B4-BE49-F238E27FC236}">
-                <a16:creationId xmlns:a16="http://schemas.microsoft.com/office/drawing/2014/main" id="{0354C6C2-33DA-0102-6360-654F993BD701}"/>
-              </a:ext>
-            </a:extLst>
-          </p:cNvPr>
+            <a:endParaRPr lang="en-US" dirty="0"/>
+          </a:p>
+        </p:txBody>
+      </p:sp>
+      <p:sp>
+        <p:nvSpPr>
+          <p:cNvPr id="3" name="Content Placeholder 2"/>
           <p:cNvSpPr>
             <a:spLocks noGrp="1"/>
           </p:cNvSpPr>
@@ -1281,8 +1130,8 @@
         </p:nvSpPr>
         <p:spPr>
           <a:xfrm>
-            <a:off x="838200" y="1825625"/>
-            <a:ext cx="5181600" cy="4351338"/>
+            <a:off x="628650" y="1825625"/>
+            <a:ext cx="3886200" cy="4351338"/>
           </a:xfrm>
         </p:spPr>
         <p:txBody>
@@ -1322,18 +1171,13 @@
               <a:rPr lang="en-US"/>
               <a:t>Fifth level</a:t>
             </a:r>
-          </a:p>
-        </p:txBody>
-      </p:sp>
-      <p:sp>
-        <p:nvSpPr>
-          <p:cNvPr id="4" name="Content Placeholder 3">
-            <a:extLst>
-              <a:ext uri="{FF2B5EF4-FFF2-40B4-BE49-F238E27FC236}">
-                <a16:creationId xmlns:a16="http://schemas.microsoft.com/office/drawing/2014/main" id="{EE2B2A58-052B-B454-9932-012243039D08}"/>
-              </a:ext>
-            </a:extLst>
-          </p:cNvPr>
+            <a:endParaRPr lang="en-US" dirty="0"/>
+          </a:p>
+        </p:txBody>
+      </p:sp>
+      <p:sp>
+        <p:nvSpPr>
+          <p:cNvPr id="4" name="Content Placeholder 3"/>
           <p:cNvSpPr>
             <a:spLocks noGrp="1"/>
           </p:cNvSpPr>
@@ -1343,8 +1187,8 @@
         </p:nvSpPr>
         <p:spPr>
           <a:xfrm>
-            <a:off x="6172200" y="1825625"/>
-            <a:ext cx="5181600" cy="4351338"/>
+            <a:off x="4629150" y="1825625"/>
+            <a:ext cx="3886200" cy="4351338"/>
           </a:xfrm>
         </p:spPr>
         <p:txBody>
@@ -1384,18 +1228,13 @@
               <a:rPr lang="en-US"/>
               <a:t>Fifth level</a:t>
             </a:r>
-          </a:p>
-        </p:txBody>
-      </p:sp>
-      <p:sp>
-        <p:nvSpPr>
-          <p:cNvPr id="5" name="Date Placeholder 4">
-            <a:extLst>
-              <a:ext uri="{FF2B5EF4-FFF2-40B4-BE49-F238E27FC236}">
-                <a16:creationId xmlns:a16="http://schemas.microsoft.com/office/drawing/2014/main" id="{52B92D04-ECBD-D55F-A459-4C28DF6A8C2E}"/>
-              </a:ext>
-            </a:extLst>
-          </p:cNvPr>
+            <a:endParaRPr lang="en-US" dirty="0"/>
+          </a:p>
+        </p:txBody>
+      </p:sp>
+      <p:sp>
+        <p:nvSpPr>
+          <p:cNvPr id="5" name="Date Placeholder 4"/>
           <p:cNvSpPr>
             <a:spLocks noGrp="1"/>
           </p:cNvSpPr>
@@ -1410,7 +1249,7 @@
           <a:p>
             <a:fld id="{E759A0DE-F190-5444-87AC-4719D5F20D15}" type="datetimeFigureOut">
               <a:rPr lang="en-US" smtClean="0"/>
-              <a:t>5/31/26</a:t>
+              <a:t>6/6/26</a:t>
             </a:fld>
             <a:endParaRPr lang="en-US"/>
           </a:p>
@@ -1418,13 +1257,7 @@
       </p:sp>
       <p:sp>
         <p:nvSpPr>
-          <p:cNvPr id="6" name="Footer Placeholder 5">
-            <a:extLst>
-              <a:ext uri="{FF2B5EF4-FFF2-40B4-BE49-F238E27FC236}">
-                <a16:creationId xmlns:a16="http://schemas.microsoft.com/office/drawing/2014/main" id="{DF69ACAC-11AF-A864-BD18-A4B426A4AA03}"/>
-              </a:ext>
-            </a:extLst>
-          </p:cNvPr>
+          <p:cNvPr id="6" name="Footer Placeholder 5"/>
           <p:cNvSpPr>
             <a:spLocks noGrp="1"/>
           </p:cNvSpPr>
@@ -1443,13 +1276,7 @@
       </p:sp>
       <p:sp>
         <p:nvSpPr>
-          <p:cNvPr id="7" name="Slide Number Placeholder 6">
-            <a:extLst>
-              <a:ext uri="{FF2B5EF4-FFF2-40B4-BE49-F238E27FC236}">
-                <a16:creationId xmlns:a16="http://schemas.microsoft.com/office/drawing/2014/main" id="{3A3C5DAC-E196-CEC3-6A6B-376BB3F37D19}"/>
-              </a:ext>
-            </a:extLst>
-          </p:cNvPr>
+          <p:cNvPr id="7" name="Slide Number Placeholder 6"/>
           <p:cNvSpPr>
             <a:spLocks noGrp="1"/>
           </p:cNvSpPr>
@@ -1473,7 +1300,7 @@
     </p:spTree>
     <p:extLst>
       <p:ext uri="{BB962C8B-B14F-4D97-AF65-F5344CB8AC3E}">
-        <p14:creationId xmlns:p14="http://schemas.microsoft.com/office/powerpoint/2010/main" val="621302458"/>
+        <p14:creationId xmlns:p14="http://schemas.microsoft.com/office/powerpoint/2010/main" val="3512751109"/>
       </p:ext>
     </p:extLst>
   </p:cSld>
@@ -1502,13 +1329,7 @@
       </p:grpSpPr>
       <p:sp>
         <p:nvSpPr>
-          <p:cNvPr id="2" name="Title 1">
-            <a:extLst>
-              <a:ext uri="{FF2B5EF4-FFF2-40B4-BE49-F238E27FC236}">
-                <a16:creationId xmlns:a16="http://schemas.microsoft.com/office/drawing/2014/main" id="{0C632820-190D-235F-CEAA-9558C5413BC1}"/>
-              </a:ext>
-            </a:extLst>
-          </p:cNvPr>
+          <p:cNvPr id="2" name="Title 1"/>
           <p:cNvSpPr>
             <a:spLocks noGrp="1"/>
           </p:cNvSpPr>
@@ -1518,8 +1339,8 @@
         </p:nvSpPr>
         <p:spPr>
           <a:xfrm>
-            <a:off x="839788" y="365125"/>
-            <a:ext cx="10515600" cy="1325563"/>
+            <a:off x="629841" y="365126"/>
+            <a:ext cx="7886700" cy="1325563"/>
           </a:xfrm>
         </p:spPr>
         <p:txBody>
@@ -1530,18 +1351,13 @@
               <a:rPr lang="en-US"/>
               <a:t>Click to edit Master title style</a:t>
             </a:r>
-          </a:p>
-        </p:txBody>
-      </p:sp>
-      <p:sp>
-        <p:nvSpPr>
-          <p:cNvPr id="3" name="Text Placeholder 2">
-            <a:extLst>
-              <a:ext uri="{FF2B5EF4-FFF2-40B4-BE49-F238E27FC236}">
-                <a16:creationId xmlns:a16="http://schemas.microsoft.com/office/drawing/2014/main" id="{16693254-6651-D942-4099-84C9B6A31CF3}"/>
-              </a:ext>
-            </a:extLst>
-          </p:cNvPr>
+            <a:endParaRPr lang="en-US" dirty="0"/>
+          </a:p>
+        </p:txBody>
+      </p:sp>
+      <p:sp>
+        <p:nvSpPr>
+          <p:cNvPr id="3" name="Text Placeholder 2"/>
           <p:cNvSpPr>
             <a:spLocks noGrp="1"/>
           </p:cNvSpPr>
@@ -1551,8 +1367,8 @@
         </p:nvSpPr>
         <p:spPr>
           <a:xfrm>
-            <a:off x="839788" y="1681163"/>
-            <a:ext cx="5157787" cy="823912"/>
+            <a:off x="629842" y="1681163"/>
+            <a:ext cx="3868340" cy="823912"/>
           </a:xfrm>
         </p:spPr>
         <p:txBody>
@@ -1606,13 +1422,7 @@
       </p:sp>
       <p:sp>
         <p:nvSpPr>
-          <p:cNvPr id="4" name="Content Placeholder 3">
-            <a:extLst>
-              <a:ext uri="{FF2B5EF4-FFF2-40B4-BE49-F238E27FC236}">
-                <a16:creationId xmlns:a16="http://schemas.microsoft.com/office/drawing/2014/main" id="{D6D4DAC3-CF47-11DC-83E8-0B1192A4422A}"/>
-              </a:ext>
-            </a:extLst>
-          </p:cNvPr>
+          <p:cNvPr id="4" name="Content Placeholder 3"/>
           <p:cNvSpPr>
             <a:spLocks noGrp="1"/>
           </p:cNvSpPr>
@@ -1622,8 +1432,8 @@
         </p:nvSpPr>
         <p:spPr>
           <a:xfrm>
-            <a:off x="839788" y="2505075"/>
-            <a:ext cx="5157787" cy="3684588"/>
+            <a:off x="629842" y="2505075"/>
+            <a:ext cx="3868340" cy="3684588"/>
           </a:xfrm>
         </p:spPr>
         <p:txBody>
@@ -1663,18 +1473,13 @@
               <a:rPr lang="en-US"/>
               <a:t>Fifth level</a:t>
             </a:r>
-          </a:p>
-        </p:txBody>
-      </p:sp>
-      <p:sp>
-        <p:nvSpPr>
-          <p:cNvPr id="5" name="Text Placeholder 4">
-            <a:extLst>
-              <a:ext uri="{FF2B5EF4-FFF2-40B4-BE49-F238E27FC236}">
-                <a16:creationId xmlns:a16="http://schemas.microsoft.com/office/drawing/2014/main" id="{3C49067B-AD0F-C796-4C8F-C043DB6FD3B3}"/>
-              </a:ext>
-            </a:extLst>
-          </p:cNvPr>
+            <a:endParaRPr lang="en-US" dirty="0"/>
+          </a:p>
+        </p:txBody>
+      </p:sp>
+      <p:sp>
+        <p:nvSpPr>
+          <p:cNvPr id="5" name="Text Placeholder 4"/>
           <p:cNvSpPr>
             <a:spLocks noGrp="1"/>
           </p:cNvSpPr>
@@ -1684,8 +1489,8 @@
         </p:nvSpPr>
         <p:spPr>
           <a:xfrm>
-            <a:off x="6172200" y="1681163"/>
-            <a:ext cx="5183188" cy="823912"/>
+            <a:off x="4629150" y="1681163"/>
+            <a:ext cx="3887391" cy="823912"/>
           </a:xfrm>
         </p:spPr>
         <p:txBody>
@@ -1739,13 +1544,7 @@
       </p:sp>
       <p:sp>
         <p:nvSpPr>
-          <p:cNvPr id="6" name="Content Placeholder 5">
-            <a:extLst>
-              <a:ext uri="{FF2B5EF4-FFF2-40B4-BE49-F238E27FC236}">
-                <a16:creationId xmlns:a16="http://schemas.microsoft.com/office/drawing/2014/main" id="{A4D0695B-675B-E8DD-D931-29E639B3E559}"/>
-              </a:ext>
-            </a:extLst>
-          </p:cNvPr>
+          <p:cNvPr id="6" name="Content Placeholder 5"/>
           <p:cNvSpPr>
             <a:spLocks noGrp="1"/>
           </p:cNvSpPr>
@@ -1755,8 +1554,8 @@
         </p:nvSpPr>
         <p:spPr>
           <a:xfrm>
-            <a:off x="6172200" y="2505075"/>
-            <a:ext cx="5183188" cy="3684588"/>
+            <a:off x="4629150" y="2505075"/>
+            <a:ext cx="3887391" cy="3684588"/>
           </a:xfrm>
         </p:spPr>
         <p:txBody>
@@ -1796,18 +1595,13 @@
               <a:rPr lang="en-US"/>
               <a:t>Fifth level</a:t>
             </a:r>
-          </a:p>
-        </p:txBody>
-      </p:sp>
-      <p:sp>
-        <p:nvSpPr>
-          <p:cNvPr id="7" name="Date Placeholder 6">
-            <a:extLst>
-              <a:ext uri="{FF2B5EF4-FFF2-40B4-BE49-F238E27FC236}">
-                <a16:creationId xmlns:a16="http://schemas.microsoft.com/office/drawing/2014/main" id="{E7F5423C-A80C-353A-6ADA-AD2195CCE83B}"/>
-              </a:ext>
-            </a:extLst>
-          </p:cNvPr>
+            <a:endParaRPr lang="en-US" dirty="0"/>
+          </a:p>
+        </p:txBody>
+      </p:sp>
+      <p:sp>
+        <p:nvSpPr>
+          <p:cNvPr id="7" name="Date Placeholder 6"/>
           <p:cNvSpPr>
             <a:spLocks noGrp="1"/>
           </p:cNvSpPr>
@@ -1822,7 +1616,7 @@
           <a:p>
             <a:fld id="{E759A0DE-F190-5444-87AC-4719D5F20D15}" type="datetimeFigureOut">
               <a:rPr lang="en-US" smtClean="0"/>
-              <a:t>5/31/26</a:t>
+              <a:t>6/6/26</a:t>
             </a:fld>
             <a:endParaRPr lang="en-US"/>
           </a:p>
@@ -1830,13 +1624,7 @@
       </p:sp>
       <p:sp>
         <p:nvSpPr>
-          <p:cNvPr id="8" name="Footer Placeholder 7">
-            <a:extLst>
-              <a:ext uri="{FF2B5EF4-FFF2-40B4-BE49-F238E27FC236}">
-                <a16:creationId xmlns:a16="http://schemas.microsoft.com/office/drawing/2014/main" id="{3154C085-1B7B-06F2-2F97-8BE5AED3D908}"/>
-              </a:ext>
-            </a:extLst>
-          </p:cNvPr>
+          <p:cNvPr id="8" name="Footer Placeholder 7"/>
           <p:cNvSpPr>
             <a:spLocks noGrp="1"/>
           </p:cNvSpPr>
@@ -1855,13 +1643,7 @@
       </p:sp>
       <p:sp>
         <p:nvSpPr>
-          <p:cNvPr id="9" name="Slide Number Placeholder 8">
-            <a:extLst>
-              <a:ext uri="{FF2B5EF4-FFF2-40B4-BE49-F238E27FC236}">
-                <a16:creationId xmlns:a16="http://schemas.microsoft.com/office/drawing/2014/main" id="{A6C6B0A2-57CB-16B8-1E9B-CA6DA6337B35}"/>
-              </a:ext>
-            </a:extLst>
-          </p:cNvPr>
+          <p:cNvPr id="9" name="Slide Number Placeholder 8"/>
           <p:cNvSpPr>
             <a:spLocks noGrp="1"/>
           </p:cNvSpPr>
@@ -1885,7 +1667,7 @@
     </p:spTree>
     <p:extLst>
       <p:ext uri="{BB962C8B-B14F-4D97-AF65-F5344CB8AC3E}">
-        <p14:creationId xmlns:p14="http://schemas.microsoft.com/office/powerpoint/2010/main" val="3902579014"/>
+        <p14:creationId xmlns:p14="http://schemas.microsoft.com/office/powerpoint/2010/main" val="1698640912"/>
       </p:ext>
     </p:extLst>
   </p:cSld>
@@ -1914,13 +1696,7 @@
       </p:grpSpPr>
       <p:sp>
         <p:nvSpPr>
-          <p:cNvPr id="2" name="Title 1">
-            <a:extLst>
-              <a:ext uri="{FF2B5EF4-FFF2-40B4-BE49-F238E27FC236}">
-                <a16:creationId xmlns:a16="http://schemas.microsoft.com/office/drawing/2014/main" id="{42014C2D-A9C6-E4FF-86E0-53926609620A}"/>
-              </a:ext>
-            </a:extLst>
-          </p:cNvPr>
+          <p:cNvPr id="2" name="Title 1"/>
           <p:cNvSpPr>
             <a:spLocks noGrp="1"/>
           </p:cNvSpPr>
@@ -1937,18 +1713,13 @@
               <a:rPr lang="en-US"/>
               <a:t>Click to edit Master title style</a:t>
             </a:r>
-          </a:p>
-        </p:txBody>
-      </p:sp>
-      <p:sp>
-        <p:nvSpPr>
-          <p:cNvPr id="3" name="Date Placeholder 2">
-            <a:extLst>
-              <a:ext uri="{FF2B5EF4-FFF2-40B4-BE49-F238E27FC236}">
-                <a16:creationId xmlns:a16="http://schemas.microsoft.com/office/drawing/2014/main" id="{CAEBDED3-8FA2-E14E-6132-DBF06C0043E9}"/>
-              </a:ext>
-            </a:extLst>
-          </p:cNvPr>
+            <a:endParaRPr lang="en-US" dirty="0"/>
+          </a:p>
+        </p:txBody>
+      </p:sp>
+      <p:sp>
+        <p:nvSpPr>
+          <p:cNvPr id="3" name="Date Placeholder 2"/>
           <p:cNvSpPr>
             <a:spLocks noGrp="1"/>
           </p:cNvSpPr>
@@ -1963,7 +1734,7 @@
           <a:p>
             <a:fld id="{E759A0DE-F190-5444-87AC-4719D5F20D15}" type="datetimeFigureOut">
               <a:rPr lang="en-US" smtClean="0"/>
-              <a:t>5/31/26</a:t>
+              <a:t>6/6/26</a:t>
             </a:fld>
             <a:endParaRPr lang="en-US"/>
           </a:p>
@@ -1971,13 +1742,7 @@
       </p:sp>
       <p:sp>
         <p:nvSpPr>
-          <p:cNvPr id="4" name="Footer Placeholder 3">
-            <a:extLst>
-              <a:ext uri="{FF2B5EF4-FFF2-40B4-BE49-F238E27FC236}">
-                <a16:creationId xmlns:a16="http://schemas.microsoft.com/office/drawing/2014/main" id="{24FF1715-78D0-6155-47B7-64F32ECF5F55}"/>
-              </a:ext>
-            </a:extLst>
-          </p:cNvPr>
+          <p:cNvPr id="4" name="Footer Placeholder 3"/>
           <p:cNvSpPr>
             <a:spLocks noGrp="1"/>
           </p:cNvSpPr>
@@ -1996,13 +1761,7 @@
       </p:sp>
       <p:sp>
         <p:nvSpPr>
-          <p:cNvPr id="5" name="Slide Number Placeholder 4">
-            <a:extLst>
-              <a:ext uri="{FF2B5EF4-FFF2-40B4-BE49-F238E27FC236}">
-                <a16:creationId xmlns:a16="http://schemas.microsoft.com/office/drawing/2014/main" id="{95EE70D1-30EB-D2A6-F6C0-29E5A0681277}"/>
-              </a:ext>
-            </a:extLst>
-          </p:cNvPr>
+          <p:cNvPr id="5" name="Slide Number Placeholder 4"/>
           <p:cNvSpPr>
             <a:spLocks noGrp="1"/>
           </p:cNvSpPr>
@@ -2026,7 +1785,7 @@
     </p:spTree>
     <p:extLst>
       <p:ext uri="{BB962C8B-B14F-4D97-AF65-F5344CB8AC3E}">
-        <p14:creationId xmlns:p14="http://schemas.microsoft.com/office/powerpoint/2010/main" val="2762667879"/>
+        <p14:creationId xmlns:p14="http://schemas.microsoft.com/office/powerpoint/2010/main" val="271693648"/>
       </p:ext>
     </p:extLst>
   </p:cSld>
@@ -2055,13 +1814,7 @@
       </p:grpSpPr>
       <p:sp>
         <p:nvSpPr>
-          <p:cNvPr id="2" name="Date Placeholder 1">
-            <a:extLst>
-              <a:ext uri="{FF2B5EF4-FFF2-40B4-BE49-F238E27FC236}">
-                <a16:creationId xmlns:a16="http://schemas.microsoft.com/office/drawing/2014/main" id="{9CD2DAB5-6AD5-15BC-026B-B80E34678399}"/>
-              </a:ext>
-            </a:extLst>
-          </p:cNvPr>
+          <p:cNvPr id="2" name="Date Placeholder 1"/>
           <p:cNvSpPr>
             <a:spLocks noGrp="1"/>
           </p:cNvSpPr>
@@ -2076,7 +1829,7 @@
           <a:p>
             <a:fld id="{E759A0DE-F190-5444-87AC-4719D5F20D15}" type="datetimeFigureOut">
               <a:rPr lang="en-US" smtClean="0"/>
-              <a:t>5/31/26</a:t>
+              <a:t>6/6/26</a:t>
             </a:fld>
             <a:endParaRPr lang="en-US"/>
           </a:p>
@@ -2084,13 +1837,7 @@
       </p:sp>
       <p:sp>
         <p:nvSpPr>
-          <p:cNvPr id="3" name="Footer Placeholder 2">
-            <a:extLst>
-              <a:ext uri="{FF2B5EF4-FFF2-40B4-BE49-F238E27FC236}">
-                <a16:creationId xmlns:a16="http://schemas.microsoft.com/office/drawing/2014/main" id="{919D2783-D2E4-47AE-70D6-B4A209E13CBC}"/>
-              </a:ext>
-            </a:extLst>
-          </p:cNvPr>
+          <p:cNvPr id="3" name="Footer Placeholder 2"/>
           <p:cNvSpPr>
             <a:spLocks noGrp="1"/>
           </p:cNvSpPr>
@@ -2109,13 +1856,7 @@
       </p:sp>
       <p:sp>
         <p:nvSpPr>
-          <p:cNvPr id="4" name="Slide Number Placeholder 3">
-            <a:extLst>
-              <a:ext uri="{FF2B5EF4-FFF2-40B4-BE49-F238E27FC236}">
-                <a16:creationId xmlns:a16="http://schemas.microsoft.com/office/drawing/2014/main" id="{009A41F5-9D51-17BE-FB49-C0DC79F1FB33}"/>
-              </a:ext>
-            </a:extLst>
-          </p:cNvPr>
+          <p:cNvPr id="4" name="Slide Number Placeholder 3"/>
           <p:cNvSpPr>
             <a:spLocks noGrp="1"/>
           </p:cNvSpPr>
@@ -2139,7 +1880,7 @@
     </p:spTree>
     <p:extLst>
       <p:ext uri="{BB962C8B-B14F-4D97-AF65-F5344CB8AC3E}">
-        <p14:creationId xmlns:p14="http://schemas.microsoft.com/office/powerpoint/2010/main" val="684399818"/>
+        <p14:creationId xmlns:p14="http://schemas.microsoft.com/office/powerpoint/2010/main" val="3557287090"/>
       </p:ext>
     </p:extLst>
   </p:cSld>
@@ -2168,13 +1909,7 @@
       </p:grpSpPr>
       <p:sp>
         <p:nvSpPr>
-          <p:cNvPr id="2" name="Title 1">
-            <a:extLst>
-              <a:ext uri="{FF2B5EF4-FFF2-40B4-BE49-F238E27FC236}">
-                <a16:creationId xmlns:a16="http://schemas.microsoft.com/office/drawing/2014/main" id="{636535ED-82D6-0936-3EEB-AD9435F5EDC9}"/>
-              </a:ext>
-            </a:extLst>
-          </p:cNvPr>
+          <p:cNvPr id="2" name="Title 1"/>
           <p:cNvSpPr>
             <a:spLocks noGrp="1"/>
           </p:cNvSpPr>
@@ -2184,8 +1919,8 @@
         </p:nvSpPr>
         <p:spPr>
           <a:xfrm>
-            <a:off x="839788" y="457200"/>
-            <a:ext cx="3932237" cy="1600200"/>
+            <a:off x="629841" y="457200"/>
+            <a:ext cx="2949178" cy="1600200"/>
           </a:xfrm>
         </p:spPr>
         <p:txBody>
@@ -2200,18 +1935,13 @@
               <a:rPr lang="en-US"/>
               <a:t>Click to edit Master title style</a:t>
             </a:r>
-          </a:p>
-        </p:txBody>
-      </p:sp>
-      <p:sp>
-        <p:nvSpPr>
-          <p:cNvPr id="3" name="Content Placeholder 2">
-            <a:extLst>
-              <a:ext uri="{FF2B5EF4-FFF2-40B4-BE49-F238E27FC236}">
-                <a16:creationId xmlns:a16="http://schemas.microsoft.com/office/drawing/2014/main" id="{1803B2A4-A7AB-CDB0-D7F1-279536A2702A}"/>
-              </a:ext>
-            </a:extLst>
-          </p:cNvPr>
+            <a:endParaRPr lang="en-US" dirty="0"/>
+          </a:p>
+        </p:txBody>
+      </p:sp>
+      <p:sp>
+        <p:nvSpPr>
+          <p:cNvPr id="3" name="Content Placeholder 2"/>
           <p:cNvSpPr>
             <a:spLocks noGrp="1"/>
           </p:cNvSpPr>
@@ -2221,8 +1951,8 @@
         </p:nvSpPr>
         <p:spPr>
           <a:xfrm>
-            <a:off x="5183188" y="987425"/>
-            <a:ext cx="6172200" cy="4873625"/>
+            <a:off x="3887391" y="987426"/>
+            <a:ext cx="4629150" cy="4873625"/>
           </a:xfrm>
         </p:spPr>
         <p:txBody>
@@ -2290,18 +2020,13 @@
               <a:rPr lang="en-US"/>
               <a:t>Fifth level</a:t>
             </a:r>
-          </a:p>
-        </p:txBody>
-      </p:sp>
-      <p:sp>
-        <p:nvSpPr>
-          <p:cNvPr id="4" name="Text Placeholder 3">
-            <a:extLst>
-              <a:ext uri="{FF2B5EF4-FFF2-40B4-BE49-F238E27FC236}">
-                <a16:creationId xmlns:a16="http://schemas.microsoft.com/office/drawing/2014/main" id="{3329566A-3ACC-2A16-1AAE-6B0281DB7E3C}"/>
-              </a:ext>
-            </a:extLst>
-          </p:cNvPr>
+            <a:endParaRPr lang="en-US" dirty="0"/>
+          </a:p>
+        </p:txBody>
+      </p:sp>
+      <p:sp>
+        <p:nvSpPr>
+          <p:cNvPr id="4" name="Text Placeholder 3"/>
           <p:cNvSpPr>
             <a:spLocks noGrp="1"/>
           </p:cNvSpPr>
@@ -2311,8 +2036,8 @@
         </p:nvSpPr>
         <p:spPr>
           <a:xfrm>
-            <a:off x="839788" y="2057400"/>
-            <a:ext cx="3932237" cy="3811588"/>
+            <a:off x="629841" y="2057400"/>
+            <a:ext cx="2949178" cy="3811588"/>
           </a:xfrm>
         </p:spPr>
         <p:txBody>
@@ -2366,13 +2091,7 @@
       </p:sp>
       <p:sp>
         <p:nvSpPr>
-          <p:cNvPr id="5" name="Date Placeholder 4">
-            <a:extLst>
-              <a:ext uri="{FF2B5EF4-FFF2-40B4-BE49-F238E27FC236}">
-                <a16:creationId xmlns:a16="http://schemas.microsoft.com/office/drawing/2014/main" id="{453518F2-2B74-8F2D-171A-15986F3C5152}"/>
-              </a:ext>
-            </a:extLst>
-          </p:cNvPr>
+          <p:cNvPr id="5" name="Date Placeholder 4"/>
           <p:cNvSpPr>
             <a:spLocks noGrp="1"/>
           </p:cNvSpPr>
@@ -2387,7 +2106,7 @@
           <a:p>
             <a:fld id="{E759A0DE-F190-5444-87AC-4719D5F20D15}" type="datetimeFigureOut">
               <a:rPr lang="en-US" smtClean="0"/>
-              <a:t>5/31/26</a:t>
+              <a:t>6/6/26</a:t>
             </a:fld>
             <a:endParaRPr lang="en-US"/>
           </a:p>
@@ -2395,13 +2114,7 @@
       </p:sp>
       <p:sp>
         <p:nvSpPr>
-          <p:cNvPr id="6" name="Footer Placeholder 5">
-            <a:extLst>
-              <a:ext uri="{FF2B5EF4-FFF2-40B4-BE49-F238E27FC236}">
-                <a16:creationId xmlns:a16="http://schemas.microsoft.com/office/drawing/2014/main" id="{6DF8701B-4899-C3D0-CB2F-6C31378A510F}"/>
-              </a:ext>
-            </a:extLst>
-          </p:cNvPr>
+          <p:cNvPr id="6" name="Footer Placeholder 5"/>
           <p:cNvSpPr>
             <a:spLocks noGrp="1"/>
           </p:cNvSpPr>
@@ -2420,13 +2133,7 @@
       </p:sp>
       <p:sp>
         <p:nvSpPr>
-          <p:cNvPr id="7" name="Slide Number Placeholder 6">
-            <a:extLst>
-              <a:ext uri="{FF2B5EF4-FFF2-40B4-BE49-F238E27FC236}">
-                <a16:creationId xmlns:a16="http://schemas.microsoft.com/office/drawing/2014/main" id="{F3240FD0-A8F8-EFCD-2A69-21AB0FB076F6}"/>
-              </a:ext>
-            </a:extLst>
-          </p:cNvPr>
+          <p:cNvPr id="7" name="Slide Number Placeholder 6"/>
           <p:cNvSpPr>
             <a:spLocks noGrp="1"/>
           </p:cNvSpPr>
@@ -2450,7 +2157,7 @@
     </p:spTree>
     <p:extLst>
       <p:ext uri="{BB962C8B-B14F-4D97-AF65-F5344CB8AC3E}">
-        <p14:creationId xmlns:p14="http://schemas.microsoft.com/office/powerpoint/2010/main" val="2191778824"/>
+        <p14:creationId xmlns:p14="http://schemas.microsoft.com/office/powerpoint/2010/main" val="299995266"/>
       </p:ext>
     </p:extLst>
   </p:cSld>
@@ -2479,13 +2186,7 @@
       </p:grpSpPr>
       <p:sp>
         <p:nvSpPr>
-          <p:cNvPr id="2" name="Title 1">
-            <a:extLst>
-              <a:ext uri="{FF2B5EF4-FFF2-40B4-BE49-F238E27FC236}">
-                <a16:creationId xmlns:a16="http://schemas.microsoft.com/office/drawing/2014/main" id="{FD43467F-CDAF-BF3C-2E6D-F2EBB52C7E17}"/>
-              </a:ext>
-            </a:extLst>
-          </p:cNvPr>
+          <p:cNvPr id="2" name="Title 1"/>
           <p:cNvSpPr>
             <a:spLocks noGrp="1"/>
           </p:cNvSpPr>
@@ -2495,8 +2196,8 @@
         </p:nvSpPr>
         <p:spPr>
           <a:xfrm>
-            <a:off x="839788" y="457200"/>
-            <a:ext cx="3932237" cy="1600200"/>
+            <a:off x="629841" y="457200"/>
+            <a:ext cx="2949178" cy="1600200"/>
           </a:xfrm>
         </p:spPr>
         <p:txBody>
@@ -2511,20 +2212,15 @@
               <a:rPr lang="en-US"/>
               <a:t>Click to edit Master title style</a:t>
             </a:r>
-          </a:p>
-        </p:txBody>
-      </p:sp>
-      <p:sp>
-        <p:nvSpPr>
-          <p:cNvPr id="3" name="Picture Placeholder 2">
-            <a:extLst>
-              <a:ext uri="{FF2B5EF4-FFF2-40B4-BE49-F238E27FC236}">
-                <a16:creationId xmlns:a16="http://schemas.microsoft.com/office/drawing/2014/main" id="{63D374E6-7653-1FED-90D8-27F8F5A5A555}"/>
-              </a:ext>
-            </a:extLst>
-          </p:cNvPr>
-          <p:cNvSpPr>
-            <a:spLocks noGrp="1"/>
+            <a:endParaRPr lang="en-US" dirty="0"/>
+          </a:p>
+        </p:txBody>
+      </p:sp>
+      <p:sp>
+        <p:nvSpPr>
+          <p:cNvPr id="3" name="Picture Placeholder 2"/>
+          <p:cNvSpPr>
+            <a:spLocks noGrp="1" noChangeAspect="1"/>
           </p:cNvSpPr>
           <p:nvPr>
             <p:ph type="pic" idx="1"/>
@@ -2532,12 +2228,12 @@
         </p:nvSpPr>
         <p:spPr>
           <a:xfrm>
-            <a:off x="5183188" y="987425"/>
-            <a:ext cx="6172200" cy="4873625"/>
+            <a:off x="3887391" y="987426"/>
+            <a:ext cx="4629150" cy="4873625"/>
           </a:xfrm>
         </p:spPr>
         <p:txBody>
-          <a:bodyPr/>
+          <a:bodyPr anchor="t"/>
           <a:lstStyle>
             <a:lvl1pPr marL="0" indent="0">
               <a:buNone/>
@@ -2577,19 +2273,17 @@
             </a:lvl9pPr>
           </a:lstStyle>
           <a:p>
-            <a:endParaRPr lang="en-US"/>
-          </a:p>
-        </p:txBody>
-      </p:sp>
-      <p:sp>
-        <p:nvSpPr>
-          <p:cNvPr id="4" name="Text Placeholder 3">
-            <a:extLst>
-              <a:ext uri="{FF2B5EF4-FFF2-40B4-BE49-F238E27FC236}">
-                <a16:creationId xmlns:a16="http://schemas.microsoft.com/office/drawing/2014/main" id="{9318631D-B68A-86EE-A551-F2FE300250A2}"/>
-              </a:ext>
-            </a:extLst>
-          </p:cNvPr>
+            <a:r>
+              <a:rPr lang="en-US"/>
+              <a:t>Click icon to add picture</a:t>
+            </a:r>
+            <a:endParaRPr lang="en-US" dirty="0"/>
+          </a:p>
+        </p:txBody>
+      </p:sp>
+      <p:sp>
+        <p:nvSpPr>
+          <p:cNvPr id="4" name="Text Placeholder 3"/>
           <p:cNvSpPr>
             <a:spLocks noGrp="1"/>
           </p:cNvSpPr>
@@ -2599,8 +2293,8 @@
         </p:nvSpPr>
         <p:spPr>
           <a:xfrm>
-            <a:off x="839788" y="2057400"/>
-            <a:ext cx="3932237" cy="3811588"/>
+            <a:off x="629841" y="2057400"/>
+            <a:ext cx="2949178" cy="3811588"/>
           </a:xfrm>
         </p:spPr>
         <p:txBody>
@@ -2654,13 +2348,7 @@
       </p:sp>
       <p:sp>
         <p:nvSpPr>
-          <p:cNvPr id="5" name="Date Placeholder 4">
-            <a:extLst>
-              <a:ext uri="{FF2B5EF4-FFF2-40B4-BE49-F238E27FC236}">
-                <a16:creationId xmlns:a16="http://schemas.microsoft.com/office/drawing/2014/main" id="{0CAD5574-CD0C-0EDC-7EA2-BBDDAA07AD36}"/>
-              </a:ext>
-            </a:extLst>
-          </p:cNvPr>
+          <p:cNvPr id="5" name="Date Placeholder 4"/>
           <p:cNvSpPr>
             <a:spLocks noGrp="1"/>
           </p:cNvSpPr>
@@ -2675,7 +2363,7 @@
           <a:p>
             <a:fld id="{E759A0DE-F190-5444-87AC-4719D5F20D15}" type="datetimeFigureOut">
               <a:rPr lang="en-US" smtClean="0"/>
-              <a:t>5/31/26</a:t>
+              <a:t>6/6/26</a:t>
             </a:fld>
             <a:endParaRPr lang="en-US"/>
           </a:p>
@@ -2683,13 +2371,7 @@
       </p:sp>
       <p:sp>
         <p:nvSpPr>
-          <p:cNvPr id="6" name="Footer Placeholder 5">
-            <a:extLst>
-              <a:ext uri="{FF2B5EF4-FFF2-40B4-BE49-F238E27FC236}">
-                <a16:creationId xmlns:a16="http://schemas.microsoft.com/office/drawing/2014/main" id="{C4ADA4F2-15B1-95FF-AFC8-0BCFB4E4E788}"/>
-              </a:ext>
-            </a:extLst>
-          </p:cNvPr>
+          <p:cNvPr id="6" name="Footer Placeholder 5"/>
           <p:cNvSpPr>
             <a:spLocks noGrp="1"/>
           </p:cNvSpPr>
@@ -2708,13 +2390,7 @@
       </p:sp>
       <p:sp>
         <p:nvSpPr>
-          <p:cNvPr id="7" name="Slide Number Placeholder 6">
-            <a:extLst>
-              <a:ext uri="{FF2B5EF4-FFF2-40B4-BE49-F238E27FC236}">
-                <a16:creationId xmlns:a16="http://schemas.microsoft.com/office/drawing/2014/main" id="{5F57356D-53C5-30FE-E0FE-A480BE6A8E8C}"/>
-              </a:ext>
-            </a:extLst>
-          </p:cNvPr>
+          <p:cNvPr id="7" name="Slide Number Placeholder 6"/>
           <p:cNvSpPr>
             <a:spLocks noGrp="1"/>
           </p:cNvSpPr>
@@ -2738,7 +2414,7 @@
     </p:spTree>
     <p:extLst>
       <p:ext uri="{BB962C8B-B14F-4D97-AF65-F5344CB8AC3E}">
-        <p14:creationId xmlns:p14="http://schemas.microsoft.com/office/powerpoint/2010/main" val="3139710704"/>
+        <p14:creationId xmlns:p14="http://schemas.microsoft.com/office/powerpoint/2010/main" val="1217404342"/>
       </p:ext>
     </p:extLst>
   </p:cSld>
@@ -2772,13 +2448,7 @@
       </p:grpSpPr>
       <p:sp>
         <p:nvSpPr>
-          <p:cNvPr id="2" name="Title Placeholder 1">
-            <a:extLst>
-              <a:ext uri="{FF2B5EF4-FFF2-40B4-BE49-F238E27FC236}">
-                <a16:creationId xmlns:a16="http://schemas.microsoft.com/office/drawing/2014/main" id="{E707FE23-AD5C-E492-4625-B3FFD7D65D58}"/>
-              </a:ext>
-            </a:extLst>
-          </p:cNvPr>
+          <p:cNvPr id="2" name="Title Placeholder 1"/>
           <p:cNvSpPr>
             <a:spLocks noGrp="1"/>
           </p:cNvSpPr>
@@ -2788,8 +2458,8 @@
         </p:nvSpPr>
         <p:spPr>
           <a:xfrm>
-            <a:off x="838200" y="365125"/>
-            <a:ext cx="10515600" cy="1325563"/>
+            <a:off x="628650" y="365126"/>
+            <a:ext cx="7886700" cy="1325563"/>
           </a:xfrm>
           <a:prstGeom prst="rect">
             <a:avLst/>
@@ -2805,18 +2475,13 @@
               <a:rPr lang="en-US"/>
               <a:t>Click to edit Master title style</a:t>
             </a:r>
-          </a:p>
-        </p:txBody>
-      </p:sp>
-      <p:sp>
-        <p:nvSpPr>
-          <p:cNvPr id="3" name="Text Placeholder 2">
-            <a:extLst>
-              <a:ext uri="{FF2B5EF4-FFF2-40B4-BE49-F238E27FC236}">
-                <a16:creationId xmlns:a16="http://schemas.microsoft.com/office/drawing/2014/main" id="{5935509A-545F-6691-9119-47A073D0143B}"/>
-              </a:ext>
-            </a:extLst>
-          </p:cNvPr>
+            <a:endParaRPr lang="en-US" dirty="0"/>
+          </a:p>
+        </p:txBody>
+      </p:sp>
+      <p:sp>
+        <p:nvSpPr>
+          <p:cNvPr id="3" name="Text Placeholder 2"/>
           <p:cNvSpPr>
             <a:spLocks noGrp="1"/>
           </p:cNvSpPr>
@@ -2826,8 +2491,8 @@
         </p:nvSpPr>
         <p:spPr>
           <a:xfrm>
-            <a:off x="838200" y="1825625"/>
-            <a:ext cx="10515600" cy="4351338"/>
+            <a:off x="628650" y="1825625"/>
+            <a:ext cx="7886700" cy="4351338"/>
           </a:xfrm>
           <a:prstGeom prst="rect">
             <a:avLst/>
@@ -2872,18 +2537,13 @@
               <a:rPr lang="en-US"/>
               <a:t>Fifth level</a:t>
             </a:r>
-          </a:p>
-        </p:txBody>
-      </p:sp>
-      <p:sp>
-        <p:nvSpPr>
-          <p:cNvPr id="4" name="Date Placeholder 3">
-            <a:extLst>
-              <a:ext uri="{FF2B5EF4-FFF2-40B4-BE49-F238E27FC236}">
-                <a16:creationId xmlns:a16="http://schemas.microsoft.com/office/drawing/2014/main" id="{B48FCAAE-1AD5-9CBF-A0F6-52A814732FD0}"/>
-              </a:ext>
-            </a:extLst>
-          </p:cNvPr>
+            <a:endParaRPr lang="en-US" dirty="0"/>
+          </a:p>
+        </p:txBody>
+      </p:sp>
+      <p:sp>
+        <p:nvSpPr>
+          <p:cNvPr id="4" name="Date Placeholder 3"/>
           <p:cNvSpPr>
             <a:spLocks noGrp="1"/>
           </p:cNvSpPr>
@@ -2893,8 +2553,8 @@
         </p:nvSpPr>
         <p:spPr>
           <a:xfrm>
-            <a:off x="838200" y="6356350"/>
-            <a:ext cx="2743200" cy="365125"/>
+            <a:off x="628650" y="6356351"/>
+            <a:ext cx="2057400" cy="365125"/>
           </a:xfrm>
           <a:prstGeom prst="rect">
             <a:avLst/>
@@ -2916,7 +2576,7 @@
           <a:p>
             <a:fld id="{E759A0DE-F190-5444-87AC-4719D5F20D15}" type="datetimeFigureOut">
               <a:rPr lang="en-US" smtClean="0"/>
-              <a:t>5/31/26</a:t>
+              <a:t>6/6/26</a:t>
             </a:fld>
             <a:endParaRPr lang="en-US"/>
           </a:p>
@@ -2924,13 +2584,7 @@
       </p:sp>
       <p:sp>
         <p:nvSpPr>
-          <p:cNvPr id="5" name="Footer Placeholder 4">
-            <a:extLst>
-              <a:ext uri="{FF2B5EF4-FFF2-40B4-BE49-F238E27FC236}">
-                <a16:creationId xmlns:a16="http://schemas.microsoft.com/office/drawing/2014/main" id="{22229717-0F21-BE11-1F19-88106B640856}"/>
-              </a:ext>
-            </a:extLst>
-          </p:cNvPr>
+          <p:cNvPr id="5" name="Footer Placeholder 4"/>
           <p:cNvSpPr>
             <a:spLocks noGrp="1"/>
           </p:cNvSpPr>
@@ -2940,8 +2594,8 @@
         </p:nvSpPr>
         <p:spPr>
           <a:xfrm>
-            <a:off x="4038600" y="6356350"/>
-            <a:ext cx="4114800" cy="365125"/>
+            <a:off x="3028950" y="6356351"/>
+            <a:ext cx="3086100" cy="365125"/>
           </a:xfrm>
           <a:prstGeom prst="rect">
             <a:avLst/>
@@ -2967,13 +2621,7 @@
       </p:sp>
       <p:sp>
         <p:nvSpPr>
-          <p:cNvPr id="6" name="Slide Number Placeholder 5">
-            <a:extLst>
-              <a:ext uri="{FF2B5EF4-FFF2-40B4-BE49-F238E27FC236}">
-                <a16:creationId xmlns:a16="http://schemas.microsoft.com/office/drawing/2014/main" id="{3858A247-FF8D-F68A-7E74-66F74B44BB8E}"/>
-              </a:ext>
-            </a:extLst>
-          </p:cNvPr>
+          <p:cNvPr id="6" name="Slide Number Placeholder 5"/>
           <p:cNvSpPr>
             <a:spLocks noGrp="1"/>
           </p:cNvSpPr>
@@ -2983,8 +2631,8 @@
         </p:nvSpPr>
         <p:spPr>
           <a:xfrm>
-            <a:off x="8610600" y="6356350"/>
-            <a:ext cx="2743200" cy="365125"/>
+            <a:off x="6457950" y="6356351"/>
+            <a:ext cx="2057400" cy="365125"/>
           </a:xfrm>
           <a:prstGeom prst="rect">
             <a:avLst/>
@@ -3015,23 +2663,23 @@
     </p:spTree>
     <p:extLst>
       <p:ext uri="{BB962C8B-B14F-4D97-AF65-F5344CB8AC3E}">
-        <p14:creationId xmlns:p14="http://schemas.microsoft.com/office/powerpoint/2010/main" val="3785378211"/>
+        <p14:creationId xmlns:p14="http://schemas.microsoft.com/office/powerpoint/2010/main" val="2160092655"/>
       </p:ext>
     </p:extLst>
   </p:cSld>
   <p:clrMap bg1="lt1" tx1="dk1" bg2="lt2" tx2="dk2" accent1="accent1" accent2="accent2" accent3="accent3" accent4="accent4" accent5="accent5" accent6="accent6" hlink="hlink" folHlink="folHlink"/>
   <p:sldLayoutIdLst>
-    <p:sldLayoutId id="2147483649" r:id="rId1"/>
-    <p:sldLayoutId id="2147483650" r:id="rId2"/>
-    <p:sldLayoutId id="2147483651" r:id="rId3"/>
-    <p:sldLayoutId id="2147483652" r:id="rId4"/>
-    <p:sldLayoutId id="2147483653" r:id="rId5"/>
-    <p:sldLayoutId id="2147483654" r:id="rId6"/>
-    <p:sldLayoutId id="2147483655" r:id="rId7"/>
-    <p:sldLayoutId id="2147483656" r:id="rId8"/>
-    <p:sldLayoutId id="2147483657" r:id="rId9"/>
-    <p:sldLayoutId id="2147483658" r:id="rId10"/>
-    <p:sldLayoutId id="2147483659" r:id="rId11"/>
+    <p:sldLayoutId id="2147483661" r:id="rId1"/>
+    <p:sldLayoutId id="2147483662" r:id="rId2"/>
+    <p:sldLayoutId id="2147483663" r:id="rId3"/>
+    <p:sldLayoutId id="2147483664" r:id="rId4"/>
+    <p:sldLayoutId id="2147483665" r:id="rId5"/>
+    <p:sldLayoutId id="2147483666" r:id="rId6"/>
+    <p:sldLayoutId id="2147483667" r:id="rId7"/>
+    <p:sldLayoutId id="2147483668" r:id="rId8"/>
+    <p:sldLayoutId id="2147483669" r:id="rId9"/>
+    <p:sldLayoutId id="2147483670" r:id="rId10"/>
+    <p:sldLayoutId id="2147483671" r:id="rId11"/>
   </p:sldLayoutIdLst>
   <p:txStyles>
     <p:titleStyle>
@@ -3322,369 +2970,7 @@
     <p:bg>
       <p:bgPr>
         <a:solidFill>
-          <a:schemeClr val="bg1"/>
-        </a:solidFill>
-        <a:effectLst/>
-      </p:bgPr>
-    </p:bg>
-    <p:spTree>
-      <p:nvGrpSpPr>
-        <p:cNvPr id="1" name=""/>
-        <p:cNvGrpSpPr/>
-        <p:nvPr/>
-      </p:nvGrpSpPr>
-      <p:grpSpPr>
-        <a:xfrm>
-          <a:off x="0" y="0"/>
-          <a:ext cx="0" cy="0"/>
-          <a:chOff x="0" y="0"/>
-          <a:chExt cx="0" cy="0"/>
-        </a:xfrm>
-      </p:grpSpPr>
-      <p:sp useBgFill="1">
-        <p:nvSpPr>
-          <p:cNvPr id="73" name="Rectangle 72">
-            <a:extLst>
-              <a:ext uri="{FF2B5EF4-FFF2-40B4-BE49-F238E27FC236}">
-                <a16:creationId xmlns:a16="http://schemas.microsoft.com/office/drawing/2014/main" id="{ECC07320-C2CA-4E29-8481-9D9E143C7788}"/>
-              </a:ext>
-              <a:ext uri="{C183D7F6-B498-43B3-948B-1728B52AA6E4}">
-                <adec:decorative xmlns:adec="http://schemas.microsoft.com/office/drawing/2017/decorative" val="1"/>
-              </a:ext>
-            </a:extLst>
-          </p:cNvPr>
-          <p:cNvSpPr>
-            <a:spLocks noGrp="1" noRot="1" noChangeAspect="1" noMove="1" noResize="1" noEditPoints="1" noAdjustHandles="1" noChangeArrowheads="1" noChangeShapeType="1" noTextEdit="1"/>
-          </p:cNvSpPr>
-          <p:nvPr>
-            <p:extLst>
-              <p:ext uri="{386F3935-93C4-4BCD-93E2-E3B085C9AB24}">
-                <p16:designElem xmlns:p16="http://schemas.microsoft.com/office/powerpoint/2015/main" val="1"/>
-              </p:ext>
-            </p:extLst>
-          </p:nvPr>
-        </p:nvSpPr>
-        <p:spPr>
-          <a:xfrm>
-            <a:off x="-1" y="0"/>
-            <a:ext cx="12188952" cy="6858000"/>
-          </a:xfrm>
-          <a:prstGeom prst="rect">
-            <a:avLst/>
-          </a:prstGeom>
-          <a:ln>
-            <a:noFill/>
-          </a:ln>
-        </p:spPr>
-        <p:style>
-          <a:lnRef idx="2">
-            <a:schemeClr val="accent1">
-              <a:shade val="50000"/>
-            </a:schemeClr>
-          </a:lnRef>
-          <a:fillRef idx="1">
-            <a:schemeClr val="accent1"/>
-          </a:fillRef>
-          <a:effectRef idx="0">
-            <a:schemeClr val="accent1"/>
-          </a:effectRef>
-          <a:fontRef idx="minor">
-            <a:schemeClr val="lt1"/>
-          </a:fontRef>
-        </p:style>
-        <p:txBody>
-          <a:bodyPr rtlCol="0" anchor="ctr"/>
-          <a:lstStyle/>
-          <a:p>
-            <a:pPr algn="ctr"/>
-            <a:endParaRPr lang="en-US"/>
-          </a:p>
-        </p:txBody>
-      </p:sp>
-      <p:pic>
-        <p:nvPicPr>
-          <p:cNvPr id="9" name="Picture 8">
-            <a:extLst>
-              <a:ext uri="{FF2B5EF4-FFF2-40B4-BE49-F238E27FC236}">
-                <a16:creationId xmlns:a16="http://schemas.microsoft.com/office/drawing/2014/main" id="{9606C7EB-3032-7AB1-100A-F3BFFFA318D2}"/>
-              </a:ext>
-            </a:extLst>
-          </p:cNvPr>
-          <p:cNvPicPr>
-            <a:picLocks noChangeAspect="1"/>
-          </p:cNvPicPr>
-          <p:nvPr/>
-        </p:nvPicPr>
-        <p:blipFill>
-          <a:blip r:embed="rId2"/>
-          <a:srcRect t="10097" r="-1" b="37596"/>
-          <a:stretch>
-            <a:fillRect/>
-          </a:stretch>
-        </p:blipFill>
-        <p:spPr>
-          <a:xfrm>
-            <a:off x="2522358" y="10"/>
-            <a:ext cx="9669642" cy="6857990"/>
-          </a:xfrm>
-          <a:prstGeom prst="rect">
-            <a:avLst/>
-          </a:prstGeom>
-        </p:spPr>
-      </p:pic>
-      <p:sp>
-        <p:nvSpPr>
-          <p:cNvPr id="75" name="Rectangle 74">
-            <a:extLst>
-              <a:ext uri="{FF2B5EF4-FFF2-40B4-BE49-F238E27FC236}">
-                <a16:creationId xmlns:a16="http://schemas.microsoft.com/office/drawing/2014/main" id="{178FB36B-5BFE-42CA-BC60-1115E0D95EEC}"/>
-              </a:ext>
-              <a:ext uri="{C183D7F6-B498-43B3-948B-1728B52AA6E4}">
-                <adec:decorative xmlns:adec="http://schemas.microsoft.com/office/drawing/2017/decorative" val="1"/>
-              </a:ext>
-            </a:extLst>
-          </p:cNvPr>
-          <p:cNvSpPr>
-            <a:spLocks noGrp="1" noRot="1" noChangeAspect="1" noMove="1" noResize="1" noEditPoints="1" noAdjustHandles="1" noChangeArrowheads="1" noChangeShapeType="1" noTextEdit="1"/>
-          </p:cNvSpPr>
-          <p:nvPr>
-            <p:extLst>
-              <p:ext uri="{386F3935-93C4-4BCD-93E2-E3B085C9AB24}">
-                <p16:designElem xmlns:p16="http://schemas.microsoft.com/office/powerpoint/2015/main" val="1"/>
-              </p:ext>
-            </p:extLst>
-          </p:nvPr>
-        </p:nvSpPr>
-        <p:spPr>
-          <a:xfrm>
-            <a:off x="0" y="0"/>
-            <a:ext cx="7066978" cy="6858000"/>
-          </a:xfrm>
-          <a:prstGeom prst="rect">
-            <a:avLst/>
-          </a:prstGeom>
-          <a:gradFill>
-            <a:gsLst>
-              <a:gs pos="48000">
-                <a:schemeClr val="bg1"/>
-              </a:gs>
-              <a:gs pos="35000">
-                <a:schemeClr val="bg1">
-                  <a:alpha val="77000"/>
-                </a:schemeClr>
-              </a:gs>
-              <a:gs pos="19000">
-                <a:schemeClr val="bg1">
-                  <a:alpha val="38000"/>
-                </a:schemeClr>
-              </a:gs>
-              <a:gs pos="0">
-                <a:schemeClr val="bg1">
-                  <a:alpha val="0"/>
-                </a:schemeClr>
-              </a:gs>
-              <a:gs pos="100000">
-                <a:schemeClr val="bg1"/>
-              </a:gs>
-            </a:gsLst>
-            <a:lin ang="10800000" scaled="0"/>
-          </a:gradFill>
-          <a:ln>
-            <a:noFill/>
-          </a:ln>
-        </p:spPr>
-        <p:style>
-          <a:lnRef idx="2">
-            <a:schemeClr val="accent1">
-              <a:shade val="50000"/>
-            </a:schemeClr>
-          </a:lnRef>
-          <a:fillRef idx="1">
-            <a:schemeClr val="accent1"/>
-          </a:fillRef>
-          <a:effectRef idx="0">
-            <a:schemeClr val="accent1"/>
-          </a:effectRef>
-          <a:fontRef idx="minor">
-            <a:schemeClr val="lt1"/>
-          </a:fontRef>
-        </p:style>
-        <p:txBody>
-          <a:bodyPr rtlCol="0" anchor="ctr"/>
-          <a:lstStyle/>
-          <a:p>
-            <a:pPr algn="ctr"/>
-            <a:endParaRPr lang="en-US" dirty="0"/>
-          </a:p>
-        </p:txBody>
-      </p:sp>
-      <p:sp>
-        <p:nvSpPr>
-          <p:cNvPr id="3" name="Subtitle 2">
-            <a:extLst>
-              <a:ext uri="{FF2B5EF4-FFF2-40B4-BE49-F238E27FC236}">
-                <a16:creationId xmlns:a16="http://schemas.microsoft.com/office/drawing/2014/main" id="{BDDF4048-2958-B759-F7D1-45755BE99DD7}"/>
-              </a:ext>
-            </a:extLst>
-          </p:cNvPr>
-          <p:cNvSpPr>
-            <a:spLocks noGrp="1"/>
-          </p:cNvSpPr>
-          <p:nvPr>
-            <p:ph type="subTitle" idx="1"/>
-          </p:nvPr>
-        </p:nvSpPr>
-        <p:spPr>
-          <a:xfrm>
-            <a:off x="535665" y="971634"/>
-            <a:ext cx="3973386" cy="1485319"/>
-          </a:xfrm>
-          <a:noFill/>
-        </p:spPr>
-        <p:txBody>
-          <a:bodyPr>
-            <a:normAutofit/>
-          </a:bodyPr>
-          <a:lstStyle/>
-          <a:p>
-            <a:pPr algn="l"/>
-            <a:endParaRPr lang="en-US" dirty="0">
-              <a:latin typeface="Avenir Medium" panose="02000503020000020003" pitchFamily="2" charset="0"/>
-              <a:ea typeface="Bodoni Ornaments" pitchFamily="2" charset="0"/>
-            </a:endParaRPr>
-          </a:p>
-          <a:p>
-            <a:pPr algn="l"/>
-            <a:r>
-              <a:rPr lang="en-US" sz="4000" i="1" dirty="0">
-                <a:latin typeface="Avenir Oblique" panose="02000503020000020003" pitchFamily="2" charset="0"/>
-                <a:ea typeface="Bodoni Ornaments" pitchFamily="2" charset="0"/>
-              </a:rPr>
-              <a:t>Jesus Paid It All</a:t>
-            </a:r>
-          </a:p>
-        </p:txBody>
-      </p:sp>
-    </p:spTree>
-    <p:extLst>
-      <p:ext uri="{BB962C8B-B14F-4D97-AF65-F5344CB8AC3E}">
-        <p14:creationId xmlns:p14="http://schemas.microsoft.com/office/powerpoint/2010/main" val="1687888858"/>
-      </p:ext>
-    </p:extLst>
-  </p:cSld>
-  <p:clrMapOvr>
-    <a:masterClrMapping/>
-  </p:clrMapOvr>
-  <p:timing>
-    <p:tnLst>
-      <p:par>
-        <p:cTn id="1" dur="indefinite" restart="never" nodeType="tmRoot">
-          <p:childTnLst>
-            <p:seq concurrent="1" nextAc="seek">
-              <p:cTn id="2" dur="indefinite" nodeType="mainSeq">
-                <p:childTnLst>
-                  <p:par>
-                    <p:cTn id="3" fill="hold">
-                      <p:stCondLst>
-                        <p:cond delay="indefinite"/>
-                        <p:cond evt="onBegin" delay="0">
-                          <p:tn val="2"/>
-                        </p:cond>
-                      </p:stCondLst>
-                      <p:childTnLst>
-                        <p:par>
-                          <p:cTn id="4" fill="hold">
-                            <p:stCondLst>
-                              <p:cond delay="0"/>
-                            </p:stCondLst>
-                            <p:childTnLst>
-                              <p:par>
-                                <p:cTn id="5" presetID="10" presetClass="entr" presetSubtype="0" fill="hold" grpId="0" nodeType="withEffect">
-                                  <p:stCondLst>
-                                    <p:cond delay="2000"/>
-                                  </p:stCondLst>
-                                  <p:iterate type="lt">
-                                    <p:tmPct val="10000"/>
-                                  </p:iterate>
-                                  <p:childTnLst>
-                                    <p:set>
-                                      <p:cBhvr>
-                                        <p:cTn id="6" dur="1" fill="hold">
-                                          <p:stCondLst>
-                                            <p:cond delay="0"/>
-                                          </p:stCondLst>
-                                        </p:cTn>
-                                        <p:tgtEl>
-                                          <p:spTgt spid="3">
-                                            <p:txEl>
-                                              <p:pRg st="1" end="1"/>
-                                            </p:txEl>
-                                          </p:spTgt>
-                                        </p:tgtEl>
-                                        <p:attrNameLst>
-                                          <p:attrName>style.visibility</p:attrName>
-                                        </p:attrNameLst>
-                                      </p:cBhvr>
-                                      <p:to>
-                                        <p:strVal val="visible"/>
-                                      </p:to>
-                                    </p:set>
-                                    <p:animEffect transition="in" filter="fade">
-                                      <p:cBhvr>
-                                        <p:cTn id="7" dur="400"/>
-                                        <p:tgtEl>
-                                          <p:spTgt spid="3">
-                                            <p:txEl>
-                                              <p:pRg st="1" end="1"/>
-                                            </p:txEl>
-                                          </p:spTgt>
-                                        </p:tgtEl>
-                                      </p:cBhvr>
-                                    </p:animEffect>
-                                  </p:childTnLst>
-                                </p:cTn>
-                              </p:par>
-                            </p:childTnLst>
-                          </p:cTn>
-                        </p:par>
-                      </p:childTnLst>
-                    </p:cTn>
-                  </p:par>
-                </p:childTnLst>
-              </p:cTn>
-              <p:prevCondLst>
-                <p:cond evt="onPrev" delay="0">
-                  <p:tgtEl>
-                    <p:sldTgt/>
-                  </p:tgtEl>
-                </p:cond>
-              </p:prevCondLst>
-              <p:nextCondLst>
-                <p:cond evt="onNext" delay="0">
-                  <p:tgtEl>
-                    <p:sldTgt/>
-                  </p:tgtEl>
-                </p:cond>
-              </p:nextCondLst>
-            </p:seq>
-          </p:childTnLst>
-        </p:cTn>
-      </p:par>
-    </p:tnLst>
-    <p:bldLst>
-      <p:bldP spid="3" grpId="0" build="p"/>
-    </p:bldLst>
-  </p:timing>
-</p:sld>
-</file>
-
-<file path=ppt/slides/slide2.xml><?xml version="1.0" encoding="utf-8"?>
-<p:sld xmlns:a="http://schemas.openxmlformats.org/drawingml/2006/main" xmlns:r="http://schemas.openxmlformats.org/officeDocument/2006/relationships" xmlns:p="http://schemas.openxmlformats.org/presentationml/2006/main">
-  <p:cSld>
-    <p:bg>
-      <p:bgPr>
-        <a:solidFill>
-          <a:schemeClr val="accent1"/>
+          <a:schemeClr val="tx1"/>
         </a:solidFill>
         <a:effectLst/>
       </p:bgPr>
@@ -3727,8 +3013,8 @@
         </p:nvSpPr>
         <p:spPr>
           <a:xfrm>
-            <a:off x="682831" y="497702"/>
-            <a:ext cx="10826338" cy="5862596"/>
+            <a:off x="161364" y="107576"/>
+            <a:ext cx="8758517" cy="6624917"/>
           </a:xfrm>
         </p:spPr>
         <p:txBody>
@@ -3737,7 +3023,93 @@
           </a:bodyPr>
           <a:lstStyle/>
           <a:p>
-            <a:endParaRPr lang="en-US" sz="4400" dirty="0">
+            <a:pPr algn="l"/>
+            <a:r>
+              <a:rPr lang="en-US" sz="9600" dirty="0">
+                <a:solidFill>
+                  <a:schemeClr val="bg1"/>
+                </a:solidFill>
+                <a:latin typeface="Avenir Medium" panose="02000503020000020003" pitchFamily="2" charset="0"/>
+                <a:ea typeface="Bodoni Ornaments" pitchFamily="2" charset="0"/>
+              </a:rPr>
+              <a:t>Jesus Paid It All</a:t>
+            </a:r>
+          </a:p>
+        </p:txBody>
+      </p:sp>
+    </p:spTree>
+    <p:extLst>
+      <p:ext uri="{BB962C8B-B14F-4D97-AF65-F5344CB8AC3E}">
+        <p14:creationId xmlns:p14="http://schemas.microsoft.com/office/powerpoint/2010/main" val="89724268"/>
+      </p:ext>
+    </p:extLst>
+  </p:cSld>
+  <p:clrMapOvr>
+    <a:masterClrMapping/>
+  </p:clrMapOvr>
+</p:sld>
+</file>
+
+<file path=ppt/slides/slide2.xml><?xml version="1.0" encoding="utf-8"?>
+<p:sld xmlns:a="http://schemas.openxmlformats.org/drawingml/2006/main" xmlns:r="http://schemas.openxmlformats.org/officeDocument/2006/relationships" xmlns:p="http://schemas.openxmlformats.org/presentationml/2006/main">
+  <p:cSld>
+    <p:bg>
+      <p:bgPr>
+        <a:solidFill>
+          <a:schemeClr val="tx1"/>
+        </a:solidFill>
+        <a:effectLst/>
+      </p:bgPr>
+    </p:bg>
+    <p:spTree>
+      <p:nvGrpSpPr>
+        <p:cNvPr id="1" name="">
+          <a:extLst>
+            <a:ext uri="{FF2B5EF4-FFF2-40B4-BE49-F238E27FC236}">
+              <a16:creationId xmlns:a16="http://schemas.microsoft.com/office/drawing/2014/main" id="{F9DFFBA1-BD0A-5545-0FEC-984D52DF417B}"/>
+            </a:ext>
+          </a:extLst>
+        </p:cNvPr>
+        <p:cNvGrpSpPr/>
+        <p:nvPr/>
+      </p:nvGrpSpPr>
+      <p:grpSpPr>
+        <a:xfrm>
+          <a:off x="0" y="0"/>
+          <a:ext cx="0" cy="0"/>
+          <a:chOff x="0" y="0"/>
+          <a:chExt cx="0" cy="0"/>
+        </a:xfrm>
+      </p:grpSpPr>
+      <p:sp>
+        <p:nvSpPr>
+          <p:cNvPr id="3" name="Subtitle 2">
+            <a:extLst>
+              <a:ext uri="{FF2B5EF4-FFF2-40B4-BE49-F238E27FC236}">
+                <a16:creationId xmlns:a16="http://schemas.microsoft.com/office/drawing/2014/main" id="{CA4C9D68-1A73-9231-7FA3-C1A6F21DFBAC}"/>
+              </a:ext>
+            </a:extLst>
+          </p:cNvPr>
+          <p:cNvSpPr>
+            <a:spLocks noGrp="1"/>
+          </p:cNvSpPr>
+          <p:nvPr>
+            <p:ph type="subTitle" idx="1"/>
+          </p:nvPr>
+        </p:nvSpPr>
+        <p:spPr>
+          <a:xfrm>
+            <a:off x="203200" y="152400"/>
+            <a:ext cx="8724900" cy="6527799"/>
+          </a:xfrm>
+        </p:spPr>
+        <p:txBody>
+          <a:bodyPr>
+            <a:noAutofit/>
+          </a:bodyPr>
+          <a:lstStyle/>
+          <a:p>
+            <a:endParaRPr lang="en-US" sz="4800" dirty="0">
               <a:solidFill>
                 <a:schemeClr val="bg1"/>
               </a:solidFill>
@@ -3746,17 +3118,8 @@
             </a:endParaRPr>
           </a:p>
           <a:p>
-            <a:endParaRPr lang="en-US" sz="4400" dirty="0">
-              <a:solidFill>
-                <a:schemeClr val="bg1"/>
-              </a:solidFill>
-              <a:latin typeface="Avenir Medium" panose="02000503020000020003" pitchFamily="2" charset="0"/>
-              <a:ea typeface="Bodoni Ornaments" pitchFamily="2" charset="0"/>
-            </a:endParaRPr>
-          </a:p>
-          <a:p>
-            <a:r>
-              <a:rPr lang="en-US" sz="4400" dirty="0">
+            <a:r>
+              <a:rPr lang="en-US" sz="4800" dirty="0">
                 <a:solidFill>
                   <a:schemeClr val="bg1"/>
                 </a:solidFill>
@@ -3768,7 +3131,7 @@
           </a:p>
           <a:p>
             <a:r>
-              <a:rPr lang="en-US" sz="4400" dirty="0">
+              <a:rPr lang="en-US" sz="4800" dirty="0">
                 <a:solidFill>
                   <a:schemeClr val="bg1"/>
                 </a:solidFill>
@@ -3780,19 +3143,31 @@
           </a:p>
           <a:p>
             <a:r>
-              <a:rPr lang="en-US" sz="4400" dirty="0">
+              <a:rPr lang="en-US" sz="4800" dirty="0">
                 <a:solidFill>
                   <a:schemeClr val="bg1"/>
                 </a:solidFill>
                 <a:latin typeface="Avenir Medium" panose="02000503020000020003" pitchFamily="2" charset="0"/>
                 <a:ea typeface="Bodoni Ornaments" pitchFamily="2" charset="0"/>
               </a:rPr>
-              <a:t>Child of weakness, watch and pray,</a:t>
-            </a:r>
-          </a:p>
-          <a:p>
-            <a:r>
-              <a:rPr lang="en-US" sz="4400" dirty="0">
+              <a:t>Child of weakness, </a:t>
+            </a:r>
+          </a:p>
+          <a:p>
+            <a:r>
+              <a:rPr lang="en-US" sz="4800" dirty="0">
+                <a:solidFill>
+                  <a:schemeClr val="bg1"/>
+                </a:solidFill>
+                <a:latin typeface="Avenir Medium" panose="02000503020000020003" pitchFamily="2" charset="0"/>
+                <a:ea typeface="Bodoni Ornaments" pitchFamily="2" charset="0"/>
+              </a:rPr>
+              <a:t>watch and pray,</a:t>
+            </a:r>
+          </a:p>
+          <a:p>
+            <a:r>
+              <a:rPr lang="en-US" sz="4800" dirty="0">
                 <a:solidFill>
                   <a:schemeClr val="bg1"/>
                 </a:solidFill>
@@ -3807,7 +3182,7 @@
     </p:spTree>
     <p:extLst>
       <p:ext uri="{BB962C8B-B14F-4D97-AF65-F5344CB8AC3E}">
-        <p14:creationId xmlns:p14="http://schemas.microsoft.com/office/powerpoint/2010/main" val="89724268"/>
+        <p14:creationId xmlns:p14="http://schemas.microsoft.com/office/powerpoint/2010/main" val="3404236782"/>
       </p:ext>
     </p:extLst>
   </p:cSld>
@@ -3823,9 +3198,7 @@
     <p:bg>
       <p:bgPr>
         <a:solidFill>
-          <a:schemeClr val="accent5">
-            <a:lumMod val="50000"/>
-          </a:schemeClr>
+          <a:schemeClr val="tx1"/>
         </a:solidFill>
         <a:effectLst/>
       </p:bgPr>
@@ -3868,8 +3241,8 @@
         </p:nvSpPr>
         <p:spPr>
           <a:xfrm>
-            <a:off x="682831" y="497702"/>
-            <a:ext cx="10826338" cy="5862596"/>
+            <a:off x="228600" y="139700"/>
+            <a:ext cx="8737600" cy="6540499"/>
           </a:xfrm>
         </p:spPr>
         <p:txBody>
@@ -3878,7 +3251,7 @@
           </a:bodyPr>
           <a:lstStyle/>
           <a:p>
-            <a:endParaRPr lang="en-US" sz="4400" dirty="0">
+            <a:endParaRPr lang="en-US" sz="4800" dirty="0">
               <a:solidFill>
                 <a:schemeClr val="bg1"/>
               </a:solidFill>
@@ -3887,7 +3260,7 @@
             </a:endParaRPr>
           </a:p>
           <a:p>
-            <a:endParaRPr lang="en-US" sz="4400" dirty="0">
+            <a:endParaRPr lang="en-US" sz="4800" dirty="0">
               <a:solidFill>
                 <a:schemeClr val="bg1"/>
               </a:solidFill>
@@ -3897,7 +3270,7 @@
           </a:p>
           <a:p>
             <a:r>
-              <a:rPr lang="en-US" sz="4400" dirty="0">
+              <a:rPr lang="en-US" sz="4800" dirty="0">
                 <a:solidFill>
                   <a:schemeClr val="bg1"/>
                 </a:solidFill>
@@ -3909,7 +3282,7 @@
           </a:p>
           <a:p>
             <a:r>
-              <a:rPr lang="en-US" sz="4400" dirty="0">
+              <a:rPr lang="en-US" sz="4800" dirty="0">
                 <a:solidFill>
                   <a:schemeClr val="bg1"/>
                 </a:solidFill>
@@ -3921,7 +3294,7 @@
           </a:p>
           <a:p>
             <a:r>
-              <a:rPr lang="en-US" sz="4400" dirty="0">
+              <a:rPr lang="en-US" sz="4800" dirty="0">
                 <a:solidFill>
                   <a:schemeClr val="bg1"/>
                 </a:solidFill>
@@ -3933,7 +3306,7 @@
           </a:p>
           <a:p>
             <a:r>
-              <a:rPr lang="en-US" sz="4400" dirty="0">
+              <a:rPr lang="en-US" sz="4800" dirty="0">
                 <a:solidFill>
                   <a:schemeClr val="bg1"/>
                 </a:solidFill>
@@ -3964,7 +3337,7 @@
     <p:bg>
       <p:bgPr>
         <a:solidFill>
-          <a:schemeClr val="accent1"/>
+          <a:schemeClr val="tx1"/>
         </a:solidFill>
         <a:effectLst/>
       </p:bgPr>
@@ -4007,8 +3380,8 @@
         </p:nvSpPr>
         <p:spPr>
           <a:xfrm>
-            <a:off x="682831" y="497702"/>
-            <a:ext cx="10826338" cy="5862596"/>
+            <a:off x="228600" y="114300"/>
+            <a:ext cx="8699500" cy="6591299"/>
           </a:xfrm>
         </p:spPr>
         <p:txBody>
@@ -4017,7 +3390,7 @@
           </a:bodyPr>
           <a:lstStyle/>
           <a:p>
-            <a:endParaRPr lang="en-US" sz="4400" dirty="0">
+            <a:endParaRPr lang="en-US" sz="4800" dirty="0">
               <a:solidFill>
                 <a:schemeClr val="bg1"/>
               </a:solidFill>
@@ -4026,7 +3399,7 @@
             </a:endParaRPr>
           </a:p>
           <a:p>
-            <a:endParaRPr lang="en-US" sz="4400" dirty="0">
+            <a:endParaRPr lang="en-US" sz="4800" dirty="0">
               <a:solidFill>
                 <a:schemeClr val="bg1"/>
               </a:solidFill>
@@ -4036,7 +3409,7 @@
           </a:p>
           <a:p>
             <a:r>
-              <a:rPr lang="en-US" sz="4400" dirty="0">
+              <a:rPr lang="en-US" sz="4800" dirty="0">
                 <a:solidFill>
                   <a:schemeClr val="bg1"/>
                 </a:solidFill>
@@ -4048,7 +3421,7 @@
           </a:p>
           <a:p>
             <a:r>
-              <a:rPr lang="en-US" sz="4400" dirty="0">
+              <a:rPr lang="en-US" sz="4800" dirty="0">
                 <a:solidFill>
                   <a:schemeClr val="bg1"/>
                 </a:solidFill>
@@ -4058,7 +3431,7 @@
               <a:t>Thy </a:t>
             </a:r>
             <a:r>
-              <a:rPr lang="en-US" sz="4400" dirty="0" err="1">
+              <a:rPr lang="en-US" sz="4800" dirty="0" err="1">
                 <a:solidFill>
                   <a:schemeClr val="bg1"/>
                 </a:solidFill>
@@ -4068,7 +3441,7 @@
               <a:t>pow'r</a:t>
             </a:r>
             <a:r>
-              <a:rPr lang="en-US" sz="4400" dirty="0">
+              <a:rPr lang="en-US" sz="4800" dirty="0">
                 <a:solidFill>
                   <a:schemeClr val="bg1"/>
                 </a:solidFill>
@@ -4080,7 +3453,7 @@
           </a:p>
           <a:p>
             <a:r>
-              <a:rPr lang="en-US" sz="4400" dirty="0">
+              <a:rPr lang="en-US" sz="4800" dirty="0">
                 <a:solidFill>
                   <a:schemeClr val="bg1"/>
                 </a:solidFill>
@@ -4092,7 +3465,7 @@
           </a:p>
           <a:p>
             <a:r>
-              <a:rPr lang="en-US" sz="4400" dirty="0">
+              <a:rPr lang="en-US" sz="4800" dirty="0">
                 <a:solidFill>
                   <a:schemeClr val="bg1"/>
                 </a:solidFill>
@@ -4123,9 +3496,7 @@
     <p:bg>
       <p:bgPr>
         <a:solidFill>
-          <a:schemeClr val="accent5">
-            <a:lumMod val="50000"/>
-          </a:schemeClr>
+          <a:schemeClr val="tx1"/>
         </a:solidFill>
         <a:effectLst/>
       </p:bgPr>
@@ -4135,7 +3506,7 @@
         <p:cNvPr id="1" name="">
           <a:extLst>
             <a:ext uri="{FF2B5EF4-FFF2-40B4-BE49-F238E27FC236}">
-              <a16:creationId xmlns:a16="http://schemas.microsoft.com/office/drawing/2014/main" id="{A99C6446-1466-75F1-3BE4-D7E5F0F82F8B}"/>
+              <a16:creationId xmlns:a16="http://schemas.microsoft.com/office/drawing/2014/main" id="{0AADB3D3-59D0-7FCE-43CB-66903EC5E1D4}"/>
             </a:ext>
           </a:extLst>
         </p:cNvPr>
@@ -4155,7 +3526,7 @@
           <p:cNvPr id="3" name="Subtitle 2">
             <a:extLst>
               <a:ext uri="{FF2B5EF4-FFF2-40B4-BE49-F238E27FC236}">
-                <a16:creationId xmlns:a16="http://schemas.microsoft.com/office/drawing/2014/main" id="{276782DE-E625-460C-FA48-97D776294933}"/>
+                <a16:creationId xmlns:a16="http://schemas.microsoft.com/office/drawing/2014/main" id="{468C601F-8F67-04FE-9C77-9196A4EC4CC3}"/>
               </a:ext>
             </a:extLst>
           </p:cNvPr>
@@ -4168,8 +3539,8 @@
         </p:nvSpPr>
         <p:spPr>
           <a:xfrm>
-            <a:off x="682831" y="497702"/>
-            <a:ext cx="10826338" cy="5862596"/>
+            <a:off x="228600" y="139700"/>
+            <a:ext cx="8737600" cy="6540499"/>
           </a:xfrm>
         </p:spPr>
         <p:txBody>
@@ -4178,7 +3549,7 @@
           </a:bodyPr>
           <a:lstStyle/>
           <a:p>
-            <a:endParaRPr lang="en-US" sz="4400" dirty="0">
+            <a:endParaRPr lang="en-US" sz="4800" dirty="0">
               <a:solidFill>
                 <a:schemeClr val="bg1"/>
               </a:solidFill>
@@ -4187,7 +3558,7 @@
             </a:endParaRPr>
           </a:p>
           <a:p>
-            <a:endParaRPr lang="en-US" sz="4400" dirty="0">
+            <a:endParaRPr lang="en-US" sz="4800" dirty="0">
               <a:solidFill>
                 <a:schemeClr val="bg1"/>
               </a:solidFill>
@@ -4197,7 +3568,7 @@
           </a:p>
           <a:p>
             <a:r>
-              <a:rPr lang="en-US" sz="4400" dirty="0">
+              <a:rPr lang="en-US" sz="4800" dirty="0">
                 <a:solidFill>
                   <a:schemeClr val="bg1"/>
                 </a:solidFill>
@@ -4209,7 +3580,7 @@
           </a:p>
           <a:p>
             <a:r>
-              <a:rPr lang="en-US" sz="4400" dirty="0">
+              <a:rPr lang="en-US" sz="4800" dirty="0">
                 <a:solidFill>
                   <a:schemeClr val="bg1"/>
                 </a:solidFill>
@@ -4221,7 +3592,7 @@
           </a:p>
           <a:p>
             <a:r>
-              <a:rPr lang="en-US" sz="4400" dirty="0">
+              <a:rPr lang="en-US" sz="4800" dirty="0">
                 <a:solidFill>
                   <a:schemeClr val="bg1"/>
                 </a:solidFill>
@@ -4233,7 +3604,7 @@
           </a:p>
           <a:p>
             <a:r>
-              <a:rPr lang="en-US" sz="4400" dirty="0">
+              <a:rPr lang="en-US" sz="4800" dirty="0">
                 <a:solidFill>
                   <a:schemeClr val="bg1"/>
                 </a:solidFill>
@@ -4248,7 +3619,7 @@
     </p:spTree>
     <p:extLst>
       <p:ext uri="{BB962C8B-B14F-4D97-AF65-F5344CB8AC3E}">
-        <p14:creationId xmlns:p14="http://schemas.microsoft.com/office/powerpoint/2010/main" val="3482481361"/>
+        <p14:creationId xmlns:p14="http://schemas.microsoft.com/office/powerpoint/2010/main" val="3672281059"/>
       </p:ext>
     </p:extLst>
   </p:cSld>
@@ -4264,7 +3635,7 @@
     <p:bg>
       <p:bgPr>
         <a:solidFill>
-          <a:schemeClr val="accent1"/>
+          <a:schemeClr val="tx1"/>
         </a:solidFill>
         <a:effectLst/>
       </p:bgPr>
@@ -4307,8 +3678,8 @@
         </p:nvSpPr>
         <p:spPr>
           <a:xfrm>
-            <a:off x="682831" y="497702"/>
-            <a:ext cx="10826338" cy="5862596"/>
+            <a:off x="254000" y="127000"/>
+            <a:ext cx="8699499" cy="6578599"/>
           </a:xfrm>
         </p:spPr>
         <p:txBody>
@@ -4317,7 +3688,7 @@
           </a:bodyPr>
           <a:lstStyle/>
           <a:p>
-            <a:endParaRPr lang="en-US" sz="4400" dirty="0">
+            <a:endParaRPr lang="en-US" sz="4800" dirty="0">
               <a:solidFill>
                 <a:schemeClr val="bg1"/>
               </a:solidFill>
@@ -4326,7 +3697,7 @@
             </a:endParaRPr>
           </a:p>
           <a:p>
-            <a:endParaRPr lang="en-US" sz="4400" dirty="0">
+            <a:endParaRPr lang="en-US" sz="4800" dirty="0">
               <a:solidFill>
                 <a:schemeClr val="bg1"/>
               </a:solidFill>
@@ -4336,7 +3707,7 @@
           </a:p>
           <a:p>
             <a:r>
-              <a:rPr lang="en-US" sz="4400" dirty="0">
+              <a:rPr lang="en-US" sz="4800" dirty="0">
                 <a:solidFill>
                   <a:schemeClr val="bg1"/>
                 </a:solidFill>
@@ -4348,7 +3719,7 @@
           </a:p>
           <a:p>
             <a:r>
-              <a:rPr lang="en-US" sz="4400" dirty="0">
+              <a:rPr lang="en-US" sz="4800" dirty="0">
                 <a:solidFill>
                   <a:schemeClr val="bg1"/>
                 </a:solidFill>
@@ -4360,7 +3731,7 @@
           </a:p>
           <a:p>
             <a:r>
-              <a:rPr lang="en-US" sz="4400" dirty="0">
+              <a:rPr lang="en-US" sz="4800" dirty="0">
                 <a:solidFill>
                   <a:schemeClr val="bg1"/>
                 </a:solidFill>
@@ -4372,7 +3743,7 @@
           </a:p>
           <a:p>
             <a:r>
-              <a:rPr lang="en-US" sz="4400" dirty="0">
+              <a:rPr lang="en-US" sz="4800" dirty="0">
                 <a:solidFill>
                   <a:schemeClr val="bg1"/>
                 </a:solidFill>
@@ -4403,9 +3774,7 @@
     <p:bg>
       <p:bgPr>
         <a:solidFill>
-          <a:schemeClr val="accent5">
-            <a:lumMod val="50000"/>
-          </a:schemeClr>
+          <a:schemeClr val="tx1"/>
         </a:solidFill>
         <a:effectLst/>
       </p:bgPr>
@@ -4415,7 +3784,7 @@
         <p:cNvPr id="1" name="">
           <a:extLst>
             <a:ext uri="{FF2B5EF4-FFF2-40B4-BE49-F238E27FC236}">
-              <a16:creationId xmlns:a16="http://schemas.microsoft.com/office/drawing/2014/main" id="{DA9A350A-3CA0-994A-3FE1-62AF4A036FEA}"/>
+              <a16:creationId xmlns:a16="http://schemas.microsoft.com/office/drawing/2014/main" id="{F4C7772D-9403-4BDB-A994-4A2C70D6473C}"/>
             </a:ext>
           </a:extLst>
         </p:cNvPr>
@@ -4435,7 +3804,7 @@
           <p:cNvPr id="3" name="Subtitle 2">
             <a:extLst>
               <a:ext uri="{FF2B5EF4-FFF2-40B4-BE49-F238E27FC236}">
-                <a16:creationId xmlns:a16="http://schemas.microsoft.com/office/drawing/2014/main" id="{EF7E5E34-9AE7-53ED-43EA-48359B725023}"/>
+                <a16:creationId xmlns:a16="http://schemas.microsoft.com/office/drawing/2014/main" id="{C38733F4-D531-52C3-71DA-0C927FC6B919}"/>
               </a:ext>
             </a:extLst>
           </p:cNvPr>
@@ -4448,8 +3817,8 @@
         </p:nvSpPr>
         <p:spPr>
           <a:xfrm>
-            <a:off x="682831" y="497702"/>
-            <a:ext cx="10826338" cy="5862596"/>
+            <a:off x="228600" y="139700"/>
+            <a:ext cx="8737600" cy="6540499"/>
           </a:xfrm>
         </p:spPr>
         <p:txBody>
@@ -4458,7 +3827,7 @@
           </a:bodyPr>
           <a:lstStyle/>
           <a:p>
-            <a:endParaRPr lang="en-US" sz="4400" dirty="0">
+            <a:endParaRPr lang="en-US" sz="4800" dirty="0">
               <a:solidFill>
                 <a:schemeClr val="bg1"/>
               </a:solidFill>
@@ -4467,7 +3836,7 @@
             </a:endParaRPr>
           </a:p>
           <a:p>
-            <a:endParaRPr lang="en-US" sz="4400" dirty="0">
+            <a:endParaRPr lang="en-US" sz="4800" dirty="0">
               <a:solidFill>
                 <a:schemeClr val="bg1"/>
               </a:solidFill>
@@ -4477,7 +3846,7 @@
           </a:p>
           <a:p>
             <a:r>
-              <a:rPr lang="en-US" sz="4400" dirty="0">
+              <a:rPr lang="en-US" sz="4800" dirty="0">
                 <a:solidFill>
                   <a:schemeClr val="bg1"/>
                 </a:solidFill>
@@ -4489,7 +3858,7 @@
           </a:p>
           <a:p>
             <a:r>
-              <a:rPr lang="en-US" sz="4400" dirty="0">
+              <a:rPr lang="en-US" sz="4800" dirty="0">
                 <a:solidFill>
                   <a:schemeClr val="bg1"/>
                 </a:solidFill>
@@ -4501,7 +3870,7 @@
           </a:p>
           <a:p>
             <a:r>
-              <a:rPr lang="en-US" sz="4400" dirty="0">
+              <a:rPr lang="en-US" sz="4800" dirty="0">
                 <a:solidFill>
                   <a:schemeClr val="bg1"/>
                 </a:solidFill>
@@ -4513,7 +3882,7 @@
           </a:p>
           <a:p>
             <a:r>
-              <a:rPr lang="en-US" sz="4400" dirty="0">
+              <a:rPr lang="en-US" sz="4800" dirty="0">
                 <a:solidFill>
                   <a:schemeClr val="bg1"/>
                 </a:solidFill>
@@ -4528,7 +3897,7 @@
     </p:spTree>
     <p:extLst>
       <p:ext uri="{BB962C8B-B14F-4D97-AF65-F5344CB8AC3E}">
-        <p14:creationId xmlns:p14="http://schemas.microsoft.com/office/powerpoint/2010/main" val="350274450"/>
+        <p14:creationId xmlns:p14="http://schemas.microsoft.com/office/powerpoint/2010/main" val="733886693"/>
       </p:ext>
     </p:extLst>
   </p:cSld>
@@ -4587,8 +3956,8 @@
         </p:nvSpPr>
         <p:spPr>
           <a:xfrm>
-            <a:off x="682831" y="497702"/>
-            <a:ext cx="10826338" cy="5862596"/>
+            <a:off x="266700" y="165100"/>
+            <a:ext cx="8547100" cy="6438899"/>
           </a:xfrm>
         </p:spPr>
         <p:txBody>
@@ -4597,7 +3966,7 @@
           </a:bodyPr>
           <a:lstStyle/>
           <a:p>
-            <a:endParaRPr lang="en-US" sz="4400" dirty="0">
+            <a:endParaRPr lang="en-US" sz="4800" dirty="0">
               <a:solidFill>
                 <a:schemeClr val="bg1"/>
               </a:solidFill>
@@ -4607,30 +3976,30 @@
           </a:p>
           <a:p>
             <a:r>
-              <a:rPr lang="en-US" sz="4400" dirty="0">
+              <a:rPr lang="en-US" sz="4800" dirty="0">
                 <a:solidFill>
                   <a:schemeClr val="bg1"/>
                 </a:solidFill>
                 <a:latin typeface="Avenir Medium" panose="02000503020000020003" pitchFamily="2" charset="0"/>
                 <a:ea typeface="Bodoni Ornaments" pitchFamily="2" charset="0"/>
               </a:rPr>
-              <a:t>Oh praise the one who paid my debt</a:t>
-            </a:r>
-          </a:p>
-          <a:p>
-            <a:r>
-              <a:rPr lang="en-US" sz="4400" dirty="0">
+              <a:t>Oh praise the one </a:t>
+            </a:r>
+          </a:p>
+          <a:p>
+            <a:r>
+              <a:rPr lang="en-US" sz="4800" dirty="0">
                 <a:solidFill>
                   <a:schemeClr val="bg1"/>
                 </a:solidFill>
                 <a:latin typeface="Avenir Medium" panose="02000503020000020003" pitchFamily="2" charset="0"/>
                 <a:ea typeface="Bodoni Ornaments" pitchFamily="2" charset="0"/>
               </a:rPr>
-              <a:t>And raised this life up from the dead</a:t>
-            </a:r>
-          </a:p>
-          <a:p>
-            <a:endParaRPr lang="en-US" sz="4400" dirty="0">
+              <a:t>who paid my debt</a:t>
+            </a:r>
+          </a:p>
+          <a:p>
+            <a:endParaRPr lang="en-US" sz="4800" dirty="0">
               <a:solidFill>
                 <a:schemeClr val="bg1"/>
               </a:solidFill>
@@ -4640,30 +4009,39 @@
           </a:p>
           <a:p>
             <a:r>
-              <a:rPr lang="en-US" sz="4400" dirty="0">
+              <a:rPr lang="en-US" sz="4800" dirty="0">
                 <a:solidFill>
                   <a:schemeClr val="bg1"/>
                 </a:solidFill>
                 <a:latin typeface="Avenir Medium" panose="02000503020000020003" pitchFamily="2" charset="0"/>
                 <a:ea typeface="Bodoni Ornaments" pitchFamily="2" charset="0"/>
               </a:rPr>
-              <a:t>Oh praise the one who paid my debt</a:t>
-            </a:r>
-          </a:p>
-          <a:p>
-            <a:r>
-              <a:rPr lang="en-US" sz="4400" dirty="0">
+              <a:t>And raised this life </a:t>
+            </a:r>
+          </a:p>
+          <a:p>
+            <a:r>
+              <a:rPr lang="en-US" sz="4800" dirty="0">
                 <a:solidFill>
                   <a:schemeClr val="bg1"/>
                 </a:solidFill>
                 <a:latin typeface="Avenir Medium" panose="02000503020000020003" pitchFamily="2" charset="0"/>
                 <a:ea typeface="Bodoni Ornaments" pitchFamily="2" charset="0"/>
               </a:rPr>
-              <a:t>And raised this life up from the dead</a:t>
-            </a:r>
-          </a:p>
-          <a:p>
-            <a:endParaRPr lang="en-US" sz="4400" dirty="0">
+              <a:t>up from the dead</a:t>
+            </a:r>
+          </a:p>
+          <a:p>
+            <a:endParaRPr lang="en-US" sz="4800" dirty="0">
+              <a:solidFill>
+                <a:schemeClr val="bg1"/>
+              </a:solidFill>
+              <a:latin typeface="Avenir Medium" panose="02000503020000020003" pitchFamily="2" charset="0"/>
+              <a:ea typeface="Bodoni Ornaments" pitchFamily="2" charset="0"/>
+            </a:endParaRPr>
+          </a:p>
+          <a:p>
+            <a:endParaRPr lang="en-US" sz="4800" dirty="0">
               <a:solidFill>
                 <a:schemeClr val="bg1"/>
               </a:solidFill>
@@ -4686,10 +4064,188 @@
 </p:sld>
 </file>
 
+<file path=ppt/slides/slide9.xml><?xml version="1.0" encoding="utf-8"?>
+<p:sld xmlns:a="http://schemas.openxmlformats.org/drawingml/2006/main" xmlns:r="http://schemas.openxmlformats.org/officeDocument/2006/relationships" xmlns:p="http://schemas.openxmlformats.org/presentationml/2006/main">
+  <p:cSld>
+    <p:bg>
+      <p:bgPr>
+        <a:solidFill>
+          <a:schemeClr val="tx1"/>
+        </a:solidFill>
+        <a:effectLst/>
+      </p:bgPr>
+    </p:bg>
+    <p:spTree>
+      <p:nvGrpSpPr>
+        <p:cNvPr id="1" name="">
+          <a:extLst>
+            <a:ext uri="{FF2B5EF4-FFF2-40B4-BE49-F238E27FC236}">
+              <a16:creationId xmlns:a16="http://schemas.microsoft.com/office/drawing/2014/main" id="{09E3C13C-B36C-DACE-B725-CED8495FAEAA}"/>
+            </a:ext>
+          </a:extLst>
+        </p:cNvPr>
+        <p:cNvGrpSpPr/>
+        <p:nvPr/>
+      </p:nvGrpSpPr>
+      <p:grpSpPr>
+        <a:xfrm>
+          <a:off x="0" y="0"/>
+          <a:ext cx="0" cy="0"/>
+          <a:chOff x="0" y="0"/>
+          <a:chExt cx="0" cy="0"/>
+        </a:xfrm>
+      </p:grpSpPr>
+      <p:sp>
+        <p:nvSpPr>
+          <p:cNvPr id="3" name="Subtitle 2">
+            <a:extLst>
+              <a:ext uri="{FF2B5EF4-FFF2-40B4-BE49-F238E27FC236}">
+                <a16:creationId xmlns:a16="http://schemas.microsoft.com/office/drawing/2014/main" id="{35856FF3-AD10-F106-688A-F754753A1544}"/>
+              </a:ext>
+            </a:extLst>
+          </p:cNvPr>
+          <p:cNvSpPr>
+            <a:spLocks noGrp="1"/>
+          </p:cNvSpPr>
+          <p:nvPr>
+            <p:ph type="subTitle" idx="1"/>
+          </p:nvPr>
+        </p:nvSpPr>
+        <p:spPr>
+          <a:xfrm>
+            <a:off x="228600" y="139700"/>
+            <a:ext cx="8737600" cy="6540499"/>
+          </a:xfrm>
+        </p:spPr>
+        <p:txBody>
+          <a:bodyPr>
+            <a:noAutofit/>
+          </a:bodyPr>
+          <a:lstStyle/>
+          <a:p>
+            <a:endParaRPr lang="en-US" sz="4800" dirty="0">
+              <a:solidFill>
+                <a:schemeClr val="bg1"/>
+              </a:solidFill>
+              <a:latin typeface="Avenir Medium" panose="02000503020000020003" pitchFamily="2" charset="0"/>
+              <a:ea typeface="Bodoni Ornaments" pitchFamily="2" charset="0"/>
+            </a:endParaRPr>
+          </a:p>
+          <a:p>
+            <a:endParaRPr lang="en-US" sz="4800" dirty="0">
+              <a:solidFill>
+                <a:schemeClr val="bg1"/>
+              </a:solidFill>
+              <a:latin typeface="Avenir Medium" panose="02000503020000020003" pitchFamily="2" charset="0"/>
+              <a:ea typeface="Bodoni Ornaments" pitchFamily="2" charset="0"/>
+            </a:endParaRPr>
+          </a:p>
+          <a:p>
+            <a:r>
+              <a:rPr lang="en-US" sz="4800" dirty="0">
+                <a:solidFill>
+                  <a:schemeClr val="bg1"/>
+                </a:solidFill>
+                <a:latin typeface="Avenir Medium" panose="02000503020000020003" pitchFamily="2" charset="0"/>
+                <a:ea typeface="Bodoni Ornaments" pitchFamily="2" charset="0"/>
+              </a:rPr>
+              <a:t>Jesus paid it all</a:t>
+            </a:r>
+          </a:p>
+          <a:p>
+            <a:r>
+              <a:rPr lang="en-US" sz="4800" dirty="0">
+                <a:solidFill>
+                  <a:schemeClr val="bg1"/>
+                </a:solidFill>
+                <a:latin typeface="Avenir Medium" panose="02000503020000020003" pitchFamily="2" charset="0"/>
+                <a:ea typeface="Bodoni Ornaments" pitchFamily="2" charset="0"/>
+              </a:rPr>
+              <a:t>All to Him I owe</a:t>
+            </a:r>
+          </a:p>
+          <a:p>
+            <a:r>
+              <a:rPr lang="en-US" sz="4800" dirty="0">
+                <a:solidFill>
+                  <a:schemeClr val="bg1"/>
+                </a:solidFill>
+                <a:latin typeface="Avenir Medium" panose="02000503020000020003" pitchFamily="2" charset="0"/>
+                <a:ea typeface="Bodoni Ornaments" pitchFamily="2" charset="0"/>
+              </a:rPr>
+              <a:t>Sin had left a crimson stain</a:t>
+            </a:r>
+          </a:p>
+          <a:p>
+            <a:r>
+              <a:rPr lang="en-US" sz="4800" dirty="0">
+                <a:solidFill>
+                  <a:schemeClr val="bg1"/>
+                </a:solidFill>
+                <a:latin typeface="Avenir Medium" panose="02000503020000020003" pitchFamily="2" charset="0"/>
+                <a:ea typeface="Bodoni Ornaments" pitchFamily="2" charset="0"/>
+              </a:rPr>
+              <a:t>He washed it white as snow</a:t>
+            </a:r>
+          </a:p>
+        </p:txBody>
+      </p:sp>
+      <p:sp>
+        <p:nvSpPr>
+          <p:cNvPr id="2" name="TextBox 1">
+            <a:extLst>
+              <a:ext uri="{FF2B5EF4-FFF2-40B4-BE49-F238E27FC236}">
+                <a16:creationId xmlns:a16="http://schemas.microsoft.com/office/drawing/2014/main" id="{D233DC0E-75C8-FE32-0476-834277F5BEAB}"/>
+              </a:ext>
+            </a:extLst>
+          </p:cNvPr>
+          <p:cNvSpPr txBox="1"/>
+          <p:nvPr/>
+        </p:nvSpPr>
+        <p:spPr>
+          <a:xfrm>
+            <a:off x="7390614" y="6488668"/>
+            <a:ext cx="1753386" cy="369332"/>
+          </a:xfrm>
+          <a:prstGeom prst="rect">
+            <a:avLst/>
+          </a:prstGeom>
+          <a:noFill/>
+        </p:spPr>
+        <p:txBody>
+          <a:bodyPr wrap="square" rtlCol="0">
+            <a:spAutoFit/>
+          </a:bodyPr>
+          <a:lstStyle/>
+          <a:p>
+            <a:r>
+              <a:rPr lang="en-US" dirty="0">
+                <a:solidFill>
+                  <a:schemeClr val="bg1"/>
+                </a:solidFill>
+              </a:rPr>
+              <a:t>CCLI#7102397</a:t>
+            </a:r>
+          </a:p>
+        </p:txBody>
+      </p:sp>
+    </p:spTree>
+    <p:extLst>
+      <p:ext uri="{BB962C8B-B14F-4D97-AF65-F5344CB8AC3E}">
+        <p14:creationId xmlns:p14="http://schemas.microsoft.com/office/powerpoint/2010/main" val="1525432484"/>
+      </p:ext>
+    </p:extLst>
+  </p:cSld>
+  <p:clrMapOvr>
+    <a:masterClrMapping/>
+  </p:clrMapOvr>
+</p:sld>
+</file>
+
 <file path=ppt/theme/theme1.xml><?xml version="1.0" encoding="utf-8"?>
 <a:theme xmlns:a="http://schemas.openxmlformats.org/drawingml/2006/main" name="Office Theme">
   <a:themeElements>
-    <a:clrScheme name="Office">
+    <a:clrScheme name="Office Theme">
       <a:dk1>
         <a:sysClr val="windowText" lastClr="000000"/>
       </a:dk1>
@@ -4727,7 +4283,7 @@
         <a:srgbClr val="96607D"/>
       </a:folHlink>
     </a:clrScheme>
-    <a:fontScheme name="Office">
+    <a:fontScheme name="Office Theme">
       <a:majorFont>
         <a:latin typeface="Aptos Display" panose="02110004020202020204"/>
         <a:ea typeface=""/>
@@ -4833,7 +4389,7 @@
         <a:font script="Tfng" typeface="Ebrima"/>
       </a:minorFont>
     </a:fontScheme>
-    <a:fmtScheme name="Office">
+    <a:fmtScheme name="Office Theme">
       <a:fillStyleLst>
         <a:solidFill>
           <a:schemeClr val="phClr"/>

--- a/Jesus Paid It All.pptx
+++ b/Jesus Paid It All.pptx
@@ -251,7 +251,7 @@
           <a:p>
             <a:fld id="{E759A0DE-F190-5444-87AC-4719D5F20D15}" type="datetimeFigureOut">
               <a:rPr lang="en-US" smtClean="0"/>
-              <a:t>6/6/26</a:t>
+              <a:t>7/18/26</a:t>
             </a:fld>
             <a:endParaRPr lang="en-US"/>
           </a:p>
@@ -421,7 +421,7 @@
           <a:p>
             <a:fld id="{E759A0DE-F190-5444-87AC-4719D5F20D15}" type="datetimeFigureOut">
               <a:rPr lang="en-US" smtClean="0"/>
-              <a:t>6/6/26</a:t>
+              <a:t>7/18/26</a:t>
             </a:fld>
             <a:endParaRPr lang="en-US"/>
           </a:p>
@@ -601,7 +601,7 @@
           <a:p>
             <a:fld id="{E759A0DE-F190-5444-87AC-4719D5F20D15}" type="datetimeFigureOut">
               <a:rPr lang="en-US" smtClean="0"/>
-              <a:t>6/6/26</a:t>
+              <a:t>7/18/26</a:t>
             </a:fld>
             <a:endParaRPr lang="en-US"/>
           </a:p>
@@ -771,7 +771,7 @@
           <a:p>
             <a:fld id="{E759A0DE-F190-5444-87AC-4719D5F20D15}" type="datetimeFigureOut">
               <a:rPr lang="en-US" smtClean="0"/>
-              <a:t>6/6/26</a:t>
+              <a:t>7/18/26</a:t>
             </a:fld>
             <a:endParaRPr lang="en-US"/>
           </a:p>
@@ -1017,7 +1017,7 @@
           <a:p>
             <a:fld id="{E759A0DE-F190-5444-87AC-4719D5F20D15}" type="datetimeFigureOut">
               <a:rPr lang="en-US" smtClean="0"/>
-              <a:t>6/6/26</a:t>
+              <a:t>7/18/26</a:t>
             </a:fld>
             <a:endParaRPr lang="en-US"/>
           </a:p>
@@ -1249,7 +1249,7 @@
           <a:p>
             <a:fld id="{E759A0DE-F190-5444-87AC-4719D5F20D15}" type="datetimeFigureOut">
               <a:rPr lang="en-US" smtClean="0"/>
-              <a:t>6/6/26</a:t>
+              <a:t>7/18/26</a:t>
             </a:fld>
             <a:endParaRPr lang="en-US"/>
           </a:p>
@@ -1616,7 +1616,7 @@
           <a:p>
             <a:fld id="{E759A0DE-F190-5444-87AC-4719D5F20D15}" type="datetimeFigureOut">
               <a:rPr lang="en-US" smtClean="0"/>
-              <a:t>6/6/26</a:t>
+              <a:t>7/18/26</a:t>
             </a:fld>
             <a:endParaRPr lang="en-US"/>
           </a:p>
@@ -1734,7 +1734,7 @@
           <a:p>
             <a:fld id="{E759A0DE-F190-5444-87AC-4719D5F20D15}" type="datetimeFigureOut">
               <a:rPr lang="en-US" smtClean="0"/>
-              <a:t>6/6/26</a:t>
+              <a:t>7/18/26</a:t>
             </a:fld>
             <a:endParaRPr lang="en-US"/>
           </a:p>
@@ -1829,7 +1829,7 @@
           <a:p>
             <a:fld id="{E759A0DE-F190-5444-87AC-4719D5F20D15}" type="datetimeFigureOut">
               <a:rPr lang="en-US" smtClean="0"/>
-              <a:t>6/6/26</a:t>
+              <a:t>7/18/26</a:t>
             </a:fld>
             <a:endParaRPr lang="en-US"/>
           </a:p>
@@ -2106,7 +2106,7 @@
           <a:p>
             <a:fld id="{E759A0DE-F190-5444-87AC-4719D5F20D15}" type="datetimeFigureOut">
               <a:rPr lang="en-US" smtClean="0"/>
-              <a:t>6/6/26</a:t>
+              <a:t>7/18/26</a:t>
             </a:fld>
             <a:endParaRPr lang="en-US"/>
           </a:p>
@@ -2363,7 +2363,7 @@
           <a:p>
             <a:fld id="{E759A0DE-F190-5444-87AC-4719D5F20D15}" type="datetimeFigureOut">
               <a:rPr lang="en-US" smtClean="0"/>
-              <a:t>6/6/26</a:t>
+              <a:t>7/18/26</a:t>
             </a:fld>
             <a:endParaRPr lang="en-US"/>
           </a:p>
@@ -2576,7 +2576,7 @@
           <a:p>
             <a:fld id="{E759A0DE-F190-5444-87AC-4719D5F20D15}" type="datetimeFigureOut">
               <a:rPr lang="en-US" smtClean="0"/>
-              <a:t>6/6/26</a:t>
+              <a:t>7/18/26</a:t>
             </a:fld>
             <a:endParaRPr lang="en-US"/>
           </a:p>
@@ -3037,6 +3037,92 @@
           </a:p>
         </p:txBody>
       </p:sp>
+      <p:sp>
+        <p:nvSpPr>
+          <p:cNvPr id="2" name="TextBox 1">
+            <a:extLst>
+              <a:ext uri="{FF2B5EF4-FFF2-40B4-BE49-F238E27FC236}">
+                <a16:creationId xmlns:a16="http://schemas.microsoft.com/office/drawing/2014/main" id="{D428F4DD-66CA-E94B-913C-8F879A08889F}"/>
+              </a:ext>
+            </a:extLst>
+          </p:cNvPr>
+          <p:cNvSpPr txBox="1"/>
+          <p:nvPr/>
+        </p:nvSpPr>
+        <p:spPr>
+          <a:xfrm>
+            <a:off x="168442" y="5444311"/>
+            <a:ext cx="8807115" cy="1200329"/>
+          </a:xfrm>
+          <a:prstGeom prst="rect">
+            <a:avLst/>
+          </a:prstGeom>
+          <a:noFill/>
+        </p:spPr>
+        <p:txBody>
+          <a:bodyPr wrap="square" rtlCol="0">
+            <a:spAutoFit/>
+          </a:bodyPr>
+          <a:lstStyle/>
+          <a:p>
+            <a:pPr algn="ctr"/>
+            <a:r>
+              <a:rPr lang="en-US" dirty="0">
+                <a:solidFill>
+                  <a:schemeClr val="bg1"/>
+                </a:solidFill>
+              </a:rPr>
+              <a:t>Words by Elvina M. </a:t>
+            </a:r>
+            <a:r>
+              <a:rPr lang="en-US">
+                <a:solidFill>
+                  <a:schemeClr val="bg1"/>
+                </a:solidFill>
+              </a:rPr>
+              <a:t>Hall (1865)</a:t>
+            </a:r>
+            <a:endParaRPr lang="en-US" dirty="0">
+              <a:solidFill>
+                <a:schemeClr val="bg1"/>
+              </a:solidFill>
+            </a:endParaRPr>
+          </a:p>
+          <a:p>
+            <a:pPr algn="ctr"/>
+            <a:r>
+              <a:rPr lang="en-US" dirty="0">
+                <a:solidFill>
+                  <a:schemeClr val="bg1"/>
+                </a:solidFill>
+              </a:rPr>
+              <a:t>Music by John T. Grape (1868)</a:t>
+            </a:r>
+          </a:p>
+          <a:p>
+            <a:pPr algn="ctr"/>
+            <a:r>
+              <a:rPr lang="en-US" dirty="0">
+                <a:solidFill>
+                  <a:schemeClr val="bg1"/>
+                </a:solidFill>
+              </a:rPr>
+              <a:t>Public Domain</a:t>
+            </a:r>
+          </a:p>
+          <a:p>
+            <a:pPr algn="ctr"/>
+            <a:r>
+              <a:rPr lang="en-US" dirty="0">
+                <a:solidFill>
+                  <a:schemeClr val="bg1"/>
+                </a:solidFill>
+              </a:rPr>
+              <a:t>CCLI License #137776</a:t>
+            </a:r>
+          </a:p>
+        </p:txBody>
+      </p:sp>
     </p:spTree>
     <p:extLst>
       <p:ext uri="{BB962C8B-B14F-4D97-AF65-F5344CB8AC3E}">
@@ -4186,45 +4272,6 @@
                 <a:ea typeface="Bodoni Ornaments" pitchFamily="2" charset="0"/>
               </a:rPr>
               <a:t>He washed it white as snow</a:t>
-            </a:r>
-          </a:p>
-        </p:txBody>
-      </p:sp>
-      <p:sp>
-        <p:nvSpPr>
-          <p:cNvPr id="2" name="TextBox 1">
-            <a:extLst>
-              <a:ext uri="{FF2B5EF4-FFF2-40B4-BE49-F238E27FC236}">
-                <a16:creationId xmlns:a16="http://schemas.microsoft.com/office/drawing/2014/main" id="{D233DC0E-75C8-FE32-0476-834277F5BEAB}"/>
-              </a:ext>
-            </a:extLst>
-          </p:cNvPr>
-          <p:cNvSpPr txBox="1"/>
-          <p:nvPr/>
-        </p:nvSpPr>
-        <p:spPr>
-          <a:xfrm>
-            <a:off x="7390614" y="6488668"/>
-            <a:ext cx="1753386" cy="369332"/>
-          </a:xfrm>
-          <a:prstGeom prst="rect">
-            <a:avLst/>
-          </a:prstGeom>
-          <a:noFill/>
-        </p:spPr>
-        <p:txBody>
-          <a:bodyPr wrap="square" rtlCol="0">
-            <a:spAutoFit/>
-          </a:bodyPr>
-          <a:lstStyle/>
-          <a:p>
-            <a:r>
-              <a:rPr lang="en-US" dirty="0">
-                <a:solidFill>
-                  <a:schemeClr val="bg1"/>
-                </a:solidFill>
-              </a:rPr>
-              <a:t>CCLI#7102397</a:t>
             </a:r>
           </a:p>
         </p:txBody>
